--- a/docs/Content Producer Presentation1.pptx
+++ b/docs/Content Producer Presentation1.pptx
@@ -7,18 +7,19 @@
   <p:sldIdLst>
     <p:sldId id="256" r:id="rId2"/>
     <p:sldId id="257" r:id="rId3"/>
-    <p:sldId id="258" r:id="rId4"/>
-    <p:sldId id="261" r:id="rId5"/>
-    <p:sldId id="259" r:id="rId6"/>
-    <p:sldId id="260" r:id="rId7"/>
-    <p:sldId id="262" r:id="rId8"/>
-    <p:sldId id="263" r:id="rId9"/>
-    <p:sldId id="264" r:id="rId10"/>
-    <p:sldId id="265" r:id="rId11"/>
-    <p:sldId id="267" r:id="rId12"/>
-    <p:sldId id="269" r:id="rId13"/>
-    <p:sldId id="268" r:id="rId14"/>
-    <p:sldId id="266" r:id="rId15"/>
+    <p:sldId id="270" r:id="rId4"/>
+    <p:sldId id="258" r:id="rId5"/>
+    <p:sldId id="261" r:id="rId6"/>
+    <p:sldId id="259" r:id="rId7"/>
+    <p:sldId id="260" r:id="rId8"/>
+    <p:sldId id="262" r:id="rId9"/>
+    <p:sldId id="263" r:id="rId10"/>
+    <p:sldId id="264" r:id="rId11"/>
+    <p:sldId id="265" r:id="rId12"/>
+    <p:sldId id="267" r:id="rId13"/>
+    <p:sldId id="269" r:id="rId14"/>
+    <p:sldId id="268" r:id="rId15"/>
+    <p:sldId id="266" r:id="rId16"/>
   </p:sldIdLst>
   <p:sldSz cx="12192000" cy="6858000"/>
   <p:notesSz cx="6858000" cy="9144000"/>
@@ -117,6 +118,11 @@
       </a:defRPr>
     </a:lvl9pPr>
   </p:defaultTextStyle>
+  <p:extLst>
+    <p:ext uri="{EFAFB233-063F-42B5-8137-9DF3F51BA10A}">
+      <p15:sldGuideLst xmlns:p15="http://schemas.microsoft.com/office/powerpoint/2012/main"/>
+    </p:ext>
+  </p:extLst>
 </p:presentation>
 </file>
 
@@ -308,7 +314,7 @@
           <a:p>
             <a:fld id="{D9152B1A-94D2-4409-B512-AB650511253A}" type="datetimeFigureOut">
               <a:rPr lang="en-US" smtClean="0"/>
-              <a:t>6/5/2026</a:t>
+              <a:t>6/6/2026</a:t>
             </a:fld>
             <a:endParaRPr lang="en-US"/>
           </a:p>
@@ -646,7 +652,7 @@
           <a:p>
             <a:fld id="{D9152B1A-94D2-4409-B512-AB650511253A}" type="datetimeFigureOut">
               <a:rPr lang="en-US" smtClean="0"/>
-              <a:t>6/5/2026</a:t>
+              <a:t>6/6/2026</a:t>
             </a:fld>
             <a:endParaRPr lang="en-US"/>
           </a:p>
@@ -1047,7 +1053,7 @@
           <a:p>
             <a:fld id="{D9152B1A-94D2-4409-B512-AB650511253A}" type="datetimeFigureOut">
               <a:rPr lang="en-US" smtClean="0"/>
-              <a:t>6/5/2026</a:t>
+              <a:t>6/6/2026</a:t>
             </a:fld>
             <a:endParaRPr lang="en-US"/>
           </a:p>
@@ -1383,7 +1389,7 @@
           <a:p>
             <a:fld id="{D9152B1A-94D2-4409-B512-AB650511253A}" type="datetimeFigureOut">
               <a:rPr lang="en-US" smtClean="0"/>
-              <a:t>6/5/2026</a:t>
+              <a:t>6/6/2026</a:t>
             </a:fld>
             <a:endParaRPr lang="en-US"/>
           </a:p>
@@ -1703,7 +1709,7 @@
           <a:p>
             <a:fld id="{D9152B1A-94D2-4409-B512-AB650511253A}" type="datetimeFigureOut">
               <a:rPr lang="en-US" smtClean="0"/>
-              <a:t>6/5/2026</a:t>
+              <a:t>6/6/2026</a:t>
             </a:fld>
             <a:endParaRPr lang="en-US"/>
           </a:p>
@@ -2099,7 +2105,7 @@
           <a:p>
             <a:fld id="{D9152B1A-94D2-4409-B512-AB650511253A}" type="datetimeFigureOut">
               <a:rPr lang="en-US" smtClean="0"/>
-              <a:t>6/5/2026</a:t>
+              <a:t>6/6/2026</a:t>
             </a:fld>
             <a:endParaRPr lang="en-US"/>
           </a:p>
@@ -2356,7 +2362,7 @@
           <a:p>
             <a:fld id="{D9152B1A-94D2-4409-B512-AB650511253A}" type="datetimeFigureOut">
               <a:rPr lang="en-US" smtClean="0"/>
-              <a:t>6/5/2026</a:t>
+              <a:t>6/6/2026</a:t>
             </a:fld>
             <a:endParaRPr lang="en-US"/>
           </a:p>
@@ -2618,7 +2624,7 @@
           <a:p>
             <a:fld id="{D9152B1A-94D2-4409-B512-AB650511253A}" type="datetimeFigureOut">
               <a:rPr lang="en-US" smtClean="0"/>
-              <a:t>6/5/2026</a:t>
+              <a:t>6/6/2026</a:t>
             </a:fld>
             <a:endParaRPr lang="en-US"/>
           </a:p>
@@ -2880,7 +2886,7 @@
           <a:p>
             <a:fld id="{D9152B1A-94D2-4409-B512-AB650511253A}" type="datetimeFigureOut">
               <a:rPr lang="en-US" smtClean="0"/>
-              <a:t>6/5/2026</a:t>
+              <a:t>6/6/2026</a:t>
             </a:fld>
             <a:endParaRPr lang="en-US"/>
           </a:p>
@@ -3209,7 +3215,7 @@
           <a:p>
             <a:fld id="{D9152B1A-94D2-4409-B512-AB650511253A}" type="datetimeFigureOut">
               <a:rPr lang="en-US" smtClean="0"/>
-              <a:t>6/5/2026</a:t>
+              <a:t>6/6/2026</a:t>
             </a:fld>
             <a:endParaRPr lang="en-US"/>
           </a:p>
@@ -3532,7 +3538,7 @@
           <a:p>
             <a:fld id="{D9152B1A-94D2-4409-B512-AB650511253A}" type="datetimeFigureOut">
               <a:rPr lang="en-US" smtClean="0"/>
-              <a:t>6/5/2026</a:t>
+              <a:t>6/6/2026</a:t>
             </a:fld>
             <a:endParaRPr lang="en-US"/>
           </a:p>
@@ -3989,7 +3995,7 @@
           <a:p>
             <a:fld id="{D9152B1A-94D2-4409-B512-AB650511253A}" type="datetimeFigureOut">
               <a:rPr lang="en-US" smtClean="0"/>
-              <a:t>6/5/2026</a:t>
+              <a:t>6/6/2026</a:t>
             </a:fld>
             <a:endParaRPr lang="en-US"/>
           </a:p>
@@ -4194,7 +4200,7 @@
           <a:p>
             <a:fld id="{D9152B1A-94D2-4409-B512-AB650511253A}" type="datetimeFigureOut">
               <a:rPr lang="en-US" smtClean="0"/>
-              <a:t>6/5/2026</a:t>
+              <a:t>6/6/2026</a:t>
             </a:fld>
             <a:endParaRPr lang="en-US"/>
           </a:p>
@@ -4371,7 +4377,7 @@
           <a:p>
             <a:fld id="{D9152B1A-94D2-4409-B512-AB650511253A}" type="datetimeFigureOut">
               <a:rPr lang="en-US" smtClean="0"/>
-              <a:t>6/5/2026</a:t>
+              <a:t>6/6/2026</a:t>
             </a:fld>
             <a:endParaRPr lang="en-US"/>
           </a:p>
@@ -4704,7 +4710,7 @@
           <a:p>
             <a:fld id="{D9152B1A-94D2-4409-B512-AB650511253A}" type="datetimeFigureOut">
               <a:rPr lang="en-US" smtClean="0"/>
-              <a:t>6/5/2026</a:t>
+              <a:t>6/6/2026</a:t>
             </a:fld>
             <a:endParaRPr lang="en-US"/>
           </a:p>
@@ -5049,7 +5055,7 @@
           <a:p>
             <a:fld id="{D9152B1A-94D2-4409-B512-AB650511253A}" type="datetimeFigureOut">
               <a:rPr lang="en-US" smtClean="0"/>
-              <a:t>6/5/2026</a:t>
+              <a:t>6/6/2026</a:t>
             </a:fld>
             <a:endParaRPr lang="en-US"/>
           </a:p>
@@ -7166,7 +7172,7 @@
           <a:p>
             <a:fld id="{D9152B1A-94D2-4409-B512-AB650511253A}" type="datetimeFigureOut">
               <a:rPr lang="en-US" smtClean="0"/>
-              <a:t>6/5/2026</a:t>
+              <a:t>6/6/2026</a:t>
             </a:fld>
             <a:endParaRPr lang="en-US"/>
           </a:p>
@@ -7707,16 +7713,16 @@
           <a:p>
             <a:pPr algn="r" rtl="1"/>
             <a:r>
-              <a:rPr lang="fa-IR" dirty="0">
+              <a:rPr lang="fa-IR" b="1" dirty="0">
                 <a:solidFill>
                   <a:schemeClr val="accent1"/>
                 </a:solidFill>
                 <a:cs typeface="B Nazanin" panose="00000400000000000000" pitchFamily="2" charset="-78"/>
               </a:rPr>
-              <a:t>اولین تجربه تولید کامل یک ایده با </a:t>
-            </a:r>
-            <a:r>
-              <a:rPr lang="en-US" dirty="0">
+              <a:t>یک تجربة ایده تا تولید با </a:t>
+            </a:r>
+            <a:r>
+              <a:rPr lang="en-US" b="1" dirty="0">
                 <a:solidFill>
                   <a:schemeClr val="accent1"/>
                 </a:solidFill>
@@ -7774,6 +7780,518 @@
 </file>
 
 <file path=ppt/slides/slide10.xml><?xml version="1.0" encoding="utf-8"?>
+<p:sld xmlns:a="http://schemas.openxmlformats.org/drawingml/2006/main" xmlns:r="http://schemas.openxmlformats.org/officeDocument/2006/relationships" xmlns:p="http://schemas.openxmlformats.org/presentationml/2006/main">
+  <p:cSld>
+    <p:spTree>
+      <p:nvGrpSpPr>
+        <p:cNvPr id="1" name=""/>
+        <p:cNvGrpSpPr/>
+        <p:nvPr/>
+      </p:nvGrpSpPr>
+      <p:grpSpPr>
+        <a:xfrm>
+          <a:off x="0" y="0"/>
+          <a:ext cx="0" cy="0"/>
+          <a:chOff x="0" y="0"/>
+          <a:chExt cx="0" cy="0"/>
+        </a:xfrm>
+      </p:grpSpPr>
+      <p:sp>
+        <p:nvSpPr>
+          <p:cNvPr id="2" name="Title 1">
+            <a:extLst>
+              <a:ext uri="{FF2B5EF4-FFF2-40B4-BE49-F238E27FC236}">
+                <a16:creationId xmlns:a16="http://schemas.microsoft.com/office/drawing/2014/main" id="{EE64177A-F9CF-424F-84AA-D8C843F1B4C4}"/>
+              </a:ext>
+            </a:extLst>
+          </p:cNvPr>
+          <p:cNvSpPr>
+            <a:spLocks noGrp="1"/>
+          </p:cNvSpPr>
+          <p:nvPr>
+            <p:ph type="title"/>
+          </p:nvPr>
+        </p:nvSpPr>
+        <p:spPr/>
+        <p:txBody>
+          <a:bodyPr/>
+          <a:lstStyle/>
+          <a:p>
+            <a:pPr algn="r"/>
+            <a:r>
+              <a:rPr lang="fa-IR" b="1" i="0" dirty="0">
+                <a:solidFill>
+                  <a:schemeClr val="accent1"/>
+                </a:solidFill>
+                <a:effectLst/>
+                <a:latin typeface="-apple-system"/>
+                <a:cs typeface="B Nazanin" panose="00000400000000000000" pitchFamily="2" charset="-78"/>
+              </a:rPr>
+              <a:t>اشکالات فعلی</a:t>
+            </a:r>
+          </a:p>
+        </p:txBody>
+      </p:sp>
+      <p:sp>
+        <p:nvSpPr>
+          <p:cNvPr id="3" name="Content Placeholder 2">
+            <a:extLst>
+              <a:ext uri="{FF2B5EF4-FFF2-40B4-BE49-F238E27FC236}">
+                <a16:creationId xmlns:a16="http://schemas.microsoft.com/office/drawing/2014/main" id="{0619F152-B119-4B23-9A5D-EB233158E6F0}"/>
+              </a:ext>
+            </a:extLst>
+          </p:cNvPr>
+          <p:cNvSpPr>
+            <a:spLocks noGrp="1"/>
+          </p:cNvSpPr>
+          <p:nvPr>
+            <p:ph idx="1"/>
+          </p:nvPr>
+        </p:nvSpPr>
+        <p:spPr>
+          <a:xfrm>
+            <a:off x="2339788" y="2133600"/>
+            <a:ext cx="9164824" cy="3777622"/>
+          </a:xfrm>
+        </p:spPr>
+        <p:txBody>
+          <a:bodyPr>
+            <a:normAutofit/>
+          </a:bodyPr>
+          <a:lstStyle/>
+          <a:p>
+            <a:pPr algn="just" rtl="1"/>
+            <a:r>
+              <a:rPr lang="fa-IR" sz="2000" b="0" i="0" dirty="0">
+                <a:solidFill>
+                  <a:schemeClr val="tx1"/>
+                </a:solidFill>
+                <a:effectLst/>
+                <a:latin typeface="-apple-system"/>
+                <a:cs typeface="B Nazanin" panose="00000400000000000000" pitchFamily="2" charset="-78"/>
+              </a:rPr>
+              <a:t>دیتابیس وجود ندارد؛ بنابراین تاریخچه مقاله‌ها، جلوگیری از تکرار، </a:t>
+            </a:r>
+            <a:r>
+              <a:rPr lang="en-US" sz="2000" b="0" i="0" dirty="0">
+                <a:solidFill>
+                  <a:schemeClr val="tx1"/>
+                </a:solidFill>
+                <a:effectLst/>
+                <a:latin typeface="-apple-system"/>
+                <a:cs typeface="B Nazanin" panose="00000400000000000000" pitchFamily="2" charset="-78"/>
+              </a:rPr>
+              <a:t>audit </a:t>
+            </a:r>
+            <a:r>
+              <a:rPr lang="fa-IR" sz="2000" b="0" i="0" dirty="0">
+                <a:solidFill>
+                  <a:schemeClr val="tx1"/>
+                </a:solidFill>
+                <a:effectLst/>
+                <a:latin typeface="-apple-system"/>
+                <a:cs typeface="B Nazanin" panose="00000400000000000000" pitchFamily="2" charset="-78"/>
+              </a:rPr>
+              <a:t>و </a:t>
+            </a:r>
+            <a:r>
+              <a:rPr lang="en-US" sz="2000" b="0" i="0" dirty="0">
+                <a:solidFill>
+                  <a:schemeClr val="tx1"/>
+                </a:solidFill>
+                <a:effectLst/>
+                <a:latin typeface="-apple-system"/>
+                <a:cs typeface="B Nazanin" panose="00000400000000000000" pitchFamily="2" charset="-78"/>
+              </a:rPr>
+              <a:t>retry </a:t>
+            </a:r>
+            <a:r>
+              <a:rPr lang="fa-IR" sz="2000" b="0" i="0" dirty="0">
+                <a:solidFill>
+                  <a:schemeClr val="tx1"/>
+                </a:solidFill>
+                <a:effectLst/>
+                <a:latin typeface="-apple-system"/>
+                <a:cs typeface="B Nazanin" panose="00000400000000000000" pitchFamily="2" charset="-78"/>
+              </a:rPr>
+              <a:t>پایدار نداریم.</a:t>
+            </a:r>
+          </a:p>
+          <a:p>
+            <a:pPr algn="just" rtl="1"/>
+            <a:r>
+              <a:rPr lang="fa-IR" sz="2000" b="0" i="0" strike="sngStrike" dirty="0">
+                <a:solidFill>
+                  <a:schemeClr val="tx1"/>
+                </a:solidFill>
+                <a:effectLst/>
+                <a:latin typeface="-apple-system"/>
+                <a:cs typeface="B Nazanin" panose="00000400000000000000" pitchFamily="2" charset="-78"/>
+              </a:rPr>
+              <a:t>تأیید انسانی قبل از انتشار وجود ندارد.</a:t>
+            </a:r>
+          </a:p>
+          <a:p>
+            <a:pPr algn="just" rtl="1"/>
+            <a:r>
+              <a:rPr lang="en-US" sz="2000" b="0" i="0" dirty="0">
+                <a:solidFill>
+                  <a:schemeClr val="tx1"/>
+                </a:solidFill>
+                <a:effectLst/>
+                <a:latin typeface="-apple-system"/>
+                <a:cs typeface="B Nazanin" panose="00000400000000000000" pitchFamily="2" charset="-78"/>
+              </a:rPr>
+              <a:t>queue </a:t>
+            </a:r>
+            <a:r>
+              <a:rPr lang="fa-IR" sz="2000" b="0" i="0" dirty="0">
+                <a:solidFill>
+                  <a:schemeClr val="tx1"/>
+                </a:solidFill>
+                <a:effectLst/>
+                <a:latin typeface="-apple-system"/>
+                <a:cs typeface="B Nazanin" panose="00000400000000000000" pitchFamily="2" charset="-78"/>
+              </a:rPr>
+              <a:t>یا </a:t>
+            </a:r>
+            <a:r>
+              <a:rPr lang="en-US" sz="2000" b="0" i="0" dirty="0">
+                <a:solidFill>
+                  <a:schemeClr val="tx1"/>
+                </a:solidFill>
+                <a:effectLst/>
+                <a:latin typeface="-apple-system"/>
+                <a:cs typeface="B Nazanin" panose="00000400000000000000" pitchFamily="2" charset="-78"/>
+              </a:rPr>
+              <a:t>job history </a:t>
+            </a:r>
+            <a:r>
+              <a:rPr lang="fa-IR" sz="2000" b="0" i="0" dirty="0">
+                <a:solidFill>
+                  <a:schemeClr val="tx1"/>
+                </a:solidFill>
+                <a:effectLst/>
+                <a:latin typeface="-apple-system"/>
+                <a:cs typeface="B Nazanin" panose="00000400000000000000" pitchFamily="2" charset="-78"/>
+              </a:rPr>
+              <a:t>وجود ندارد.</a:t>
+            </a:r>
+          </a:p>
+          <a:p>
+            <a:pPr algn="just" rtl="1"/>
+            <a:r>
+              <a:rPr lang="fa-IR" sz="2000" b="0" i="0" dirty="0">
+                <a:solidFill>
+                  <a:schemeClr val="tx1"/>
+                </a:solidFill>
+                <a:effectLst/>
+                <a:latin typeface="-apple-system"/>
+                <a:cs typeface="B Nazanin" panose="00000400000000000000" pitchFamily="2" charset="-78"/>
+              </a:rPr>
+              <a:t>مانیتورینگ </a:t>
+            </a:r>
+            <a:r>
+              <a:rPr lang="en-US" sz="2000" b="0" i="0" dirty="0">
+                <a:solidFill>
+                  <a:schemeClr val="tx1"/>
+                </a:solidFill>
+                <a:effectLst/>
+                <a:latin typeface="-apple-system"/>
+                <a:cs typeface="B Nazanin" panose="00000400000000000000" pitchFamily="2" charset="-78"/>
+              </a:rPr>
+              <a:t>production </a:t>
+            </a:r>
+            <a:r>
+              <a:rPr lang="fa-IR" sz="2000" b="0" i="0" dirty="0">
+                <a:solidFill>
+                  <a:schemeClr val="tx1"/>
+                </a:solidFill>
+                <a:effectLst/>
+                <a:latin typeface="-apple-system"/>
+                <a:cs typeface="B Nazanin" panose="00000400000000000000" pitchFamily="2" charset="-78"/>
+              </a:rPr>
+              <a:t>هنوز پایه‌ای است و به </a:t>
+            </a:r>
+            <a:r>
+              <a:rPr lang="en-US" sz="2000" b="0" i="0" dirty="0">
+                <a:solidFill>
+                  <a:schemeClr val="tx1"/>
+                </a:solidFill>
+                <a:effectLst/>
+                <a:latin typeface="-apple-system"/>
+                <a:cs typeface="B Nazanin" panose="00000400000000000000" pitchFamily="2" charset="-78"/>
+              </a:rPr>
+              <a:t>log </a:t>
+            </a:r>
+            <a:r>
+              <a:rPr lang="fa-IR" sz="2000" b="0" i="0" dirty="0">
+                <a:solidFill>
+                  <a:schemeClr val="tx1"/>
+                </a:solidFill>
+                <a:effectLst/>
+                <a:latin typeface="-apple-system"/>
+                <a:cs typeface="B Nazanin" panose="00000400000000000000" pitchFamily="2" charset="-78"/>
+              </a:rPr>
+              <a:t>محدود است.</a:t>
+            </a:r>
+          </a:p>
+          <a:p>
+            <a:pPr algn="just" rtl="1"/>
+            <a:r>
+              <a:rPr lang="en-US" sz="2000" b="0" i="0" dirty="0">
+                <a:solidFill>
+                  <a:schemeClr val="tx1"/>
+                </a:solidFill>
+                <a:effectLst/>
+                <a:latin typeface="-apple-system"/>
+                <a:cs typeface="B Nazanin" panose="00000400000000000000" pitchFamily="2" charset="-78"/>
+              </a:rPr>
+              <a:t>prompt</a:t>
+            </a:r>
+            <a:r>
+              <a:rPr lang="fa-IR" sz="2000" b="0" i="0" dirty="0">
+                <a:solidFill>
+                  <a:schemeClr val="tx1"/>
+                </a:solidFill>
+                <a:effectLst/>
+                <a:latin typeface="-apple-system"/>
+                <a:cs typeface="B Nazanin" panose="00000400000000000000" pitchFamily="2" charset="-78"/>
+              </a:rPr>
+              <a:t>ها هنوز نقش زیادی در کیفیت دارند و باید با داده واقعی بهینه شوند.</a:t>
+            </a:r>
+          </a:p>
+          <a:p>
+            <a:pPr algn="just" rtl="1"/>
+            <a:r>
+              <a:rPr lang="en-US" sz="2000" b="0" i="0" dirty="0">
+                <a:solidFill>
+                  <a:schemeClr val="tx1"/>
+                </a:solidFill>
+                <a:effectLst/>
+                <a:latin typeface="-apple-system"/>
+                <a:cs typeface="B Nazanin" panose="00000400000000000000" pitchFamily="2" charset="-78"/>
+              </a:rPr>
+              <a:t>Instagram </a:t>
+            </a:r>
+            <a:r>
+              <a:rPr lang="fa-IR" sz="2000" b="0" i="0" dirty="0">
+                <a:solidFill>
+                  <a:schemeClr val="tx1"/>
+                </a:solidFill>
+                <a:effectLst/>
+                <a:latin typeface="-apple-system"/>
+                <a:cs typeface="B Nazanin" panose="00000400000000000000" pitchFamily="2" charset="-78"/>
+              </a:rPr>
+              <a:t>هنوز کامل‌ترین مسیر </a:t>
+            </a:r>
+            <a:r>
+              <a:rPr lang="en-US" sz="2000" b="0" i="0" dirty="0">
+                <a:solidFill>
+                  <a:schemeClr val="tx1"/>
+                </a:solidFill>
+                <a:effectLst/>
+                <a:latin typeface="-apple-system"/>
+                <a:cs typeface="B Nazanin" panose="00000400000000000000" pitchFamily="2" charset="-78"/>
+              </a:rPr>
+              <a:t>production </a:t>
+            </a:r>
+            <a:r>
+              <a:rPr lang="fa-IR" sz="2000" b="0" i="0" dirty="0">
+                <a:solidFill>
+                  <a:schemeClr val="tx1"/>
+                </a:solidFill>
+                <a:effectLst/>
+                <a:latin typeface="-apple-system"/>
+                <a:cs typeface="B Nazanin" panose="00000400000000000000" pitchFamily="2" charset="-78"/>
+              </a:rPr>
+              <a:t>نیست، چون به تصویر و تنظیمات </a:t>
+            </a:r>
+            <a:r>
+              <a:rPr lang="en-US" sz="2000" b="0" i="0" dirty="0">
+                <a:solidFill>
+                  <a:schemeClr val="tx1"/>
+                </a:solidFill>
+                <a:effectLst/>
+                <a:latin typeface="-apple-system"/>
+                <a:cs typeface="B Nazanin" panose="00000400000000000000" pitchFamily="2" charset="-78"/>
+              </a:rPr>
+              <a:t>Meta </a:t>
+            </a:r>
+            <a:r>
+              <a:rPr lang="fa-IR" sz="2000" b="0" i="0" dirty="0">
+                <a:solidFill>
+                  <a:schemeClr val="tx1"/>
+                </a:solidFill>
+                <a:effectLst/>
+                <a:latin typeface="-apple-system"/>
+                <a:cs typeface="B Nazanin" panose="00000400000000000000" pitchFamily="2" charset="-78"/>
+              </a:rPr>
+              <a:t>وابسته است.</a:t>
+            </a:r>
+          </a:p>
+          <a:p>
+            <a:pPr algn="just" rtl="1"/>
+            <a:r>
+              <a:rPr lang="en-US" sz="2000" b="0" i="0" dirty="0">
+                <a:solidFill>
+                  <a:schemeClr val="tx1"/>
+                </a:solidFill>
+                <a:effectLst/>
+                <a:latin typeface="-apple-system"/>
+                <a:cs typeface="B Nazanin" panose="00000400000000000000" pitchFamily="2" charset="-78"/>
+              </a:rPr>
+              <a:t>SEO </a:t>
+            </a:r>
+            <a:r>
+              <a:rPr lang="fa-IR" sz="2000" b="0" i="0" dirty="0">
+                <a:solidFill>
+                  <a:schemeClr val="tx1"/>
+                </a:solidFill>
+                <a:effectLst/>
+                <a:latin typeface="-apple-system"/>
+                <a:cs typeface="B Nazanin" panose="00000400000000000000" pitchFamily="2" charset="-78"/>
+              </a:rPr>
+              <a:t>متادیتا برای بعضی </a:t>
+            </a:r>
+            <a:r>
+              <a:rPr lang="en-US" sz="2000" b="0" i="0" dirty="0">
+                <a:solidFill>
+                  <a:schemeClr val="tx1"/>
+                </a:solidFill>
+                <a:effectLst/>
+                <a:latin typeface="-apple-system"/>
+                <a:cs typeface="B Nazanin" panose="00000400000000000000" pitchFamily="2" charset="-78"/>
+              </a:rPr>
+              <a:t>plugin</a:t>
+            </a:r>
+            <a:r>
+              <a:rPr lang="fa-IR" sz="2000" b="0" i="0" dirty="0">
+                <a:solidFill>
+                  <a:schemeClr val="tx1"/>
+                </a:solidFill>
+                <a:effectLst/>
+                <a:latin typeface="-apple-system"/>
+                <a:cs typeface="B Nazanin" panose="00000400000000000000" pitchFamily="2" charset="-78"/>
+              </a:rPr>
+              <a:t>ها ممکن است به </a:t>
+            </a:r>
+            <a:r>
+              <a:rPr lang="en-US" sz="2000" b="0" i="0" dirty="0">
+                <a:solidFill>
+                  <a:schemeClr val="tx1"/>
+                </a:solidFill>
+                <a:effectLst/>
+                <a:latin typeface="-apple-system"/>
+                <a:cs typeface="B Nazanin" panose="00000400000000000000" pitchFamily="2" charset="-78"/>
+              </a:rPr>
+              <a:t>register </a:t>
+            </a:r>
+            <a:r>
+              <a:rPr lang="fa-IR" sz="2000" b="0" i="0" dirty="0">
+                <a:solidFill>
+                  <a:schemeClr val="tx1"/>
+                </a:solidFill>
+                <a:effectLst/>
+                <a:latin typeface="-apple-system"/>
+                <a:cs typeface="B Nazanin" panose="00000400000000000000" pitchFamily="2" charset="-78"/>
+              </a:rPr>
+              <a:t>کردن </a:t>
+            </a:r>
+            <a:r>
+              <a:rPr lang="en-US" sz="2000" b="0" i="0" dirty="0">
+                <a:solidFill>
+                  <a:schemeClr val="tx1"/>
+                </a:solidFill>
+                <a:effectLst/>
+                <a:latin typeface="-apple-system"/>
+                <a:cs typeface="B Nazanin" panose="00000400000000000000" pitchFamily="2" charset="-78"/>
+              </a:rPr>
+              <a:t>meta </a:t>
+            </a:r>
+            <a:r>
+              <a:rPr lang="fa-IR" sz="2000" b="0" i="0" dirty="0">
+                <a:solidFill>
+                  <a:schemeClr val="tx1"/>
+                </a:solidFill>
+                <a:effectLst/>
+                <a:latin typeface="-apple-system"/>
+                <a:cs typeface="B Nazanin" panose="00000400000000000000" pitchFamily="2" charset="-78"/>
+              </a:rPr>
+              <a:t>در وردپرس نیاز داشته باشد.</a:t>
+            </a:r>
+          </a:p>
+          <a:p>
+            <a:pPr algn="just" rtl="1"/>
+            <a:r>
+              <a:rPr lang="fa-IR" sz="2000" b="0" i="0" dirty="0">
+                <a:solidFill>
+                  <a:schemeClr val="tx1"/>
+                </a:solidFill>
+                <a:effectLst/>
+                <a:latin typeface="-apple-system"/>
+                <a:cs typeface="B Nazanin" panose="00000400000000000000" pitchFamily="2" charset="-78"/>
+              </a:rPr>
+              <a:t>تصویرهای پیدا‌شده از صفحات منبع از نظر کیفیت، تناسب و مجوز استفاده باید قبل از انتشار عمومی بازبینی شوند.</a:t>
+            </a:r>
+          </a:p>
+        </p:txBody>
+      </p:sp>
+      <p:sp>
+        <p:nvSpPr>
+          <p:cNvPr id="5" name="TextBox 4">
+            <a:extLst>
+              <a:ext uri="{FF2B5EF4-FFF2-40B4-BE49-F238E27FC236}">
+                <a16:creationId xmlns:a16="http://schemas.microsoft.com/office/drawing/2014/main" id="{A050C4D1-4D91-47F4-BA7B-D91E90F84C07}"/>
+              </a:ext>
+            </a:extLst>
+          </p:cNvPr>
+          <p:cNvSpPr txBox="1"/>
+          <p:nvPr/>
+        </p:nvSpPr>
+        <p:spPr>
+          <a:xfrm>
+            <a:off x="243840" y="751840"/>
+            <a:ext cx="528320" cy="369332"/>
+          </a:xfrm>
+          <a:prstGeom prst="rect">
+            <a:avLst/>
+          </a:prstGeom>
+          <a:noFill/>
+        </p:spPr>
+        <p:txBody>
+          <a:bodyPr wrap="square" rtlCol="0">
+            <a:spAutoFit/>
+          </a:bodyPr>
+          <a:lstStyle/>
+          <a:p>
+            <a:pPr algn="r" rtl="1"/>
+            <a:r>
+              <a:rPr lang="en-US" dirty="0">
+                <a:solidFill>
+                  <a:schemeClr val="bg1"/>
+                </a:solidFill>
+                <a:cs typeface="B Nazanin" panose="00000400000000000000" pitchFamily="2" charset="-78"/>
+              </a:rPr>
+              <a:t>9</a:t>
+            </a:r>
+          </a:p>
+        </p:txBody>
+      </p:sp>
+    </p:spTree>
+    <p:extLst>
+      <p:ext uri="{BB962C8B-B14F-4D97-AF65-F5344CB8AC3E}">
+        <p14:creationId xmlns:p14="http://schemas.microsoft.com/office/powerpoint/2010/main" val="3472642709"/>
+      </p:ext>
+    </p:extLst>
+  </p:cSld>
+  <p:clrMapOvr>
+    <a:masterClrMapping/>
+  </p:clrMapOvr>
+</p:sld>
+</file>
+
+<file path=ppt/slides/slide11.xml><?xml version="1.0" encoding="utf-8"?>
 <p:sld xmlns:a="http://schemas.openxmlformats.org/drawingml/2006/main" xmlns:r="http://schemas.openxmlformats.org/officeDocument/2006/relationships" xmlns:p="http://schemas.openxmlformats.org/presentationml/2006/main">
   <p:cSld>
     <p:spTree>
@@ -8372,7 +8890,7 @@
 </p:sld>
 </file>
 
-<file path=ppt/slides/slide11.xml><?xml version="1.0" encoding="utf-8"?>
+<file path=ppt/slides/slide12.xml><?xml version="1.0" encoding="utf-8"?>
 <p:sld xmlns:a="http://schemas.openxmlformats.org/drawingml/2006/main" xmlns:r="http://schemas.openxmlformats.org/officeDocument/2006/relationships" xmlns:p="http://schemas.openxmlformats.org/presentationml/2006/main">
   <p:cSld>
     <p:spTree>
@@ -8638,7 +9156,7 @@
 </p:sld>
 </file>
 
-<file path=ppt/slides/slide12.xml><?xml version="1.0" encoding="utf-8"?>
+<file path=ppt/slides/slide13.xml><?xml version="1.0" encoding="utf-8"?>
 <p:sld xmlns:a="http://schemas.openxmlformats.org/drawingml/2006/main" xmlns:r="http://schemas.openxmlformats.org/officeDocument/2006/relationships" xmlns:p="http://schemas.openxmlformats.org/presentationml/2006/main">
   <p:cSld>
     <p:spTree>
@@ -9168,7 +9686,7 @@
 </p:sld>
 </file>
 
-<file path=ppt/slides/slide13.xml><?xml version="1.0" encoding="utf-8"?>
+<file path=ppt/slides/slide14.xml><?xml version="1.0" encoding="utf-8"?>
 <p:sld xmlns:a="http://schemas.openxmlformats.org/drawingml/2006/main" xmlns:r="http://schemas.openxmlformats.org/officeDocument/2006/relationships" xmlns:p="http://schemas.openxmlformats.org/presentationml/2006/main">
   <p:cSld>
     <p:spTree>
@@ -9634,7 +10152,7 @@
 </p:sld>
 </file>
 
-<file path=ppt/slides/slide14.xml><?xml version="1.0" encoding="utf-8"?>
+<file path=ppt/slides/slide15.xml><?xml version="1.0" encoding="utf-8"?>
 <p:sld xmlns:a="http://schemas.openxmlformats.org/drawingml/2006/main" xmlns:r="http://schemas.openxmlformats.org/officeDocument/2006/relationships" xmlns:p="http://schemas.openxmlformats.org/presentationml/2006/main">
   <p:cSld>
     <p:spTree>
@@ -9815,6 +10333,214 @@
 </file>
 
 <file path=ppt/slides/slide2.xml><?xml version="1.0" encoding="utf-8"?>
+<p:sld xmlns:a="http://schemas.openxmlformats.org/drawingml/2006/main" xmlns:r="http://schemas.openxmlformats.org/officeDocument/2006/relationships" xmlns:p="http://schemas.openxmlformats.org/presentationml/2006/main">
+  <p:cSld>
+    <p:spTree>
+      <p:nvGrpSpPr>
+        <p:cNvPr id="1" name=""/>
+        <p:cNvGrpSpPr/>
+        <p:nvPr/>
+      </p:nvGrpSpPr>
+      <p:grpSpPr>
+        <a:xfrm>
+          <a:off x="0" y="0"/>
+          <a:ext cx="0" cy="0"/>
+          <a:chOff x="0" y="0"/>
+          <a:chExt cx="0" cy="0"/>
+        </a:xfrm>
+      </p:grpSpPr>
+      <p:sp>
+        <p:nvSpPr>
+          <p:cNvPr id="2" name="Title 1">
+            <a:extLst>
+              <a:ext uri="{FF2B5EF4-FFF2-40B4-BE49-F238E27FC236}">
+                <a16:creationId xmlns:a16="http://schemas.microsoft.com/office/drawing/2014/main" id="{EE64177A-F9CF-424F-84AA-D8C843F1B4C4}"/>
+              </a:ext>
+            </a:extLst>
+          </p:cNvPr>
+          <p:cNvSpPr>
+            <a:spLocks noGrp="1"/>
+          </p:cNvSpPr>
+          <p:nvPr>
+            <p:ph type="title"/>
+          </p:nvPr>
+        </p:nvSpPr>
+        <p:spPr/>
+        <p:txBody>
+          <a:bodyPr/>
+          <a:lstStyle/>
+          <a:p>
+            <a:pPr algn="r"/>
+            <a:r>
+              <a:rPr lang="fa-IR" b="1" i="0" dirty="0">
+                <a:solidFill>
+                  <a:schemeClr val="accent1"/>
+                </a:solidFill>
+                <a:effectLst/>
+                <a:latin typeface="-apple-system"/>
+                <a:cs typeface="B Nazanin" panose="00000400000000000000" pitchFamily="2" charset="-78"/>
+              </a:rPr>
+              <a:t>نکته </a:t>
+            </a:r>
+            <a:br>
+              <a:rPr lang="fa-IR" b="1" i="0" dirty="0">
+                <a:solidFill>
+                  <a:schemeClr val="accent1"/>
+                </a:solidFill>
+                <a:effectLst/>
+                <a:latin typeface="-apple-system"/>
+                <a:cs typeface="B Nazanin" panose="00000400000000000000" pitchFamily="2" charset="-78"/>
+              </a:rPr>
+            </a:br>
+            <a:endParaRPr lang="en-US" dirty="0">
+              <a:solidFill>
+                <a:schemeClr val="accent1"/>
+              </a:solidFill>
+              <a:cs typeface="B Nazanin" panose="00000400000000000000" pitchFamily="2" charset="-78"/>
+            </a:endParaRPr>
+          </a:p>
+        </p:txBody>
+      </p:sp>
+      <p:sp>
+        <p:nvSpPr>
+          <p:cNvPr id="3" name="Content Placeholder 2">
+            <a:extLst>
+              <a:ext uri="{FF2B5EF4-FFF2-40B4-BE49-F238E27FC236}">
+                <a16:creationId xmlns:a16="http://schemas.microsoft.com/office/drawing/2014/main" id="{0619F152-B119-4B23-9A5D-EB233158E6F0}"/>
+              </a:ext>
+            </a:extLst>
+          </p:cNvPr>
+          <p:cNvSpPr>
+            <a:spLocks noGrp="1"/>
+          </p:cNvSpPr>
+          <p:nvPr>
+            <p:ph idx="1"/>
+          </p:nvPr>
+        </p:nvSpPr>
+        <p:spPr/>
+        <p:txBody>
+          <a:bodyPr>
+            <a:normAutofit/>
+          </a:bodyPr>
+          <a:lstStyle/>
+          <a:p>
+            <a:pPr algn="just" rtl="1"/>
+            <a:r>
+              <a:rPr lang="fa-IR" sz="1600" b="0" i="0" dirty="0">
+                <a:solidFill>
+                  <a:schemeClr val="tx1"/>
+                </a:solidFill>
+                <a:effectLst/>
+                <a:latin typeface="-apple-system"/>
+                <a:cs typeface="B Nazanin" panose="00000400000000000000" pitchFamily="2" charset="-78"/>
+              </a:rPr>
+              <a:t>این یک آموزش نیست بلکه اشتراک یک تجربه هست</a:t>
+            </a:r>
+          </a:p>
+          <a:p>
+            <a:pPr algn="just" rtl="1"/>
+            <a:r>
+              <a:rPr lang="fa-IR" sz="1600" b="0" i="0" dirty="0">
+                <a:solidFill>
+                  <a:schemeClr val="tx1"/>
+                </a:solidFill>
+                <a:effectLst/>
+                <a:latin typeface="-apple-system"/>
+                <a:cs typeface="B Nazanin" panose="00000400000000000000" pitchFamily="2" charset="-78"/>
+              </a:rPr>
+              <a:t>ممکنه هر کدوم از ما تجربه مشابه یا حتی پیشرفته تری داشته باشیم، این ارائه فقط برای ایجاد علاقه مندی ست</a:t>
+            </a:r>
+          </a:p>
+          <a:p>
+            <a:pPr algn="just" rtl="1"/>
+            <a:r>
+              <a:rPr lang="fa-IR" sz="1600" b="0" i="0">
+                <a:solidFill>
+                  <a:schemeClr val="tx1"/>
+                </a:solidFill>
+                <a:effectLst/>
+                <a:latin typeface="-apple-system"/>
+                <a:cs typeface="B Nazanin" panose="00000400000000000000" pitchFamily="2" charset="-78"/>
+              </a:rPr>
+              <a:t>من </a:t>
+            </a:r>
+            <a:r>
+              <a:rPr lang="fa-IR" sz="1600">
+                <a:solidFill>
+                  <a:schemeClr val="tx1"/>
+                </a:solidFill>
+                <a:latin typeface="-apple-system"/>
+                <a:cs typeface="B Nazanin" panose="00000400000000000000" pitchFamily="2" charset="-78"/>
+              </a:rPr>
+              <a:t>فقط </a:t>
+            </a:r>
+            <a:r>
+              <a:rPr lang="fa-IR" sz="1600" b="0" i="0">
+                <a:solidFill>
+                  <a:schemeClr val="tx1"/>
+                </a:solidFill>
+                <a:effectLst/>
+                <a:latin typeface="-apple-system"/>
+                <a:cs typeface="B Nazanin" panose="00000400000000000000" pitchFamily="2" charset="-78"/>
+              </a:rPr>
+              <a:t>به عنوان یک </a:t>
+            </a:r>
+            <a:r>
+              <a:rPr lang="fa-IR" sz="1600" b="0" i="0" dirty="0">
+                <a:solidFill>
+                  <a:schemeClr val="tx1"/>
+                </a:solidFill>
+                <a:effectLst/>
+                <a:latin typeface="-apple-system"/>
+                <a:cs typeface="B Nazanin" panose="00000400000000000000" pitchFamily="2" charset="-78"/>
+              </a:rPr>
+              <a:t>آدم غیرحرفه ای در </a:t>
+            </a:r>
+            <a:r>
+              <a:rPr lang="en-US" sz="1600" b="0" i="0" dirty="0">
+                <a:solidFill>
+                  <a:schemeClr val="tx1"/>
+                </a:solidFill>
+                <a:effectLst/>
+                <a:latin typeface="-apple-system"/>
+                <a:cs typeface="B Nazanin" panose="00000400000000000000" pitchFamily="2" charset="-78"/>
+              </a:rPr>
+              <a:t> AI</a:t>
+            </a:r>
+            <a:r>
+              <a:rPr lang="fa-IR" sz="1600" b="0" i="0" dirty="0">
+                <a:solidFill>
+                  <a:schemeClr val="tx1"/>
+                </a:solidFill>
+                <a:effectLst/>
+                <a:latin typeface="-apple-system"/>
+                <a:cs typeface="B Nazanin" panose="00000400000000000000" pitchFamily="2" charset="-78"/>
+              </a:rPr>
+              <a:t>که تونستم کاری رو پیش ببرم، میخوام بگم که شروعش خیلی سخت نیست</a:t>
+            </a:r>
+            <a:endParaRPr lang="en-US" sz="1600" dirty="0">
+              <a:solidFill>
+                <a:schemeClr val="tx1"/>
+              </a:solidFill>
+              <a:cs typeface="B Nazanin" panose="00000400000000000000" pitchFamily="2" charset="-78"/>
+            </a:endParaRPr>
+          </a:p>
+        </p:txBody>
+      </p:sp>
+    </p:spTree>
+    <p:extLst>
+      <p:ext uri="{BB962C8B-B14F-4D97-AF65-F5344CB8AC3E}">
+        <p14:creationId xmlns:p14="http://schemas.microsoft.com/office/powerpoint/2010/main" val="1199063003"/>
+      </p:ext>
+    </p:extLst>
+  </p:cSld>
+  <p:clrMapOvr>
+    <a:masterClrMapping/>
+  </p:clrMapOvr>
+</p:sld>
+</file>
+
+<file path=ppt/slides/slide3.xml><?xml version="1.0" encoding="utf-8"?>
 <p:sld xmlns:a="http://schemas.openxmlformats.org/drawingml/2006/main" xmlns:r="http://schemas.openxmlformats.org/officeDocument/2006/relationships" xmlns:p="http://schemas.openxmlformats.org/presentationml/2006/main">
   <p:cSld>
     <p:spTree>
@@ -10433,588 +11159,7 @@
     </p:spTree>
     <p:extLst>
       <p:ext uri="{BB962C8B-B14F-4D97-AF65-F5344CB8AC3E}">
-        <p14:creationId xmlns:p14="http://schemas.microsoft.com/office/powerpoint/2010/main" val="1199063003"/>
-      </p:ext>
-    </p:extLst>
-  </p:cSld>
-  <p:clrMapOvr>
-    <a:masterClrMapping/>
-  </p:clrMapOvr>
-</p:sld>
-</file>
-
-<file path=ppt/slides/slide3.xml><?xml version="1.0" encoding="utf-8"?>
-<p:sld xmlns:a="http://schemas.openxmlformats.org/drawingml/2006/main" xmlns:r="http://schemas.openxmlformats.org/officeDocument/2006/relationships" xmlns:p="http://schemas.openxmlformats.org/presentationml/2006/main">
-  <p:cSld>
-    <p:spTree>
-      <p:nvGrpSpPr>
-        <p:cNvPr id="1" name=""/>
-        <p:cNvGrpSpPr/>
-        <p:nvPr/>
-      </p:nvGrpSpPr>
-      <p:grpSpPr>
-        <a:xfrm>
-          <a:off x="0" y="0"/>
-          <a:ext cx="0" cy="0"/>
-          <a:chOff x="0" y="0"/>
-          <a:chExt cx="0" cy="0"/>
-        </a:xfrm>
-      </p:grpSpPr>
-      <p:sp>
-        <p:nvSpPr>
-          <p:cNvPr id="2" name="Title 1">
-            <a:extLst>
-              <a:ext uri="{FF2B5EF4-FFF2-40B4-BE49-F238E27FC236}">
-                <a16:creationId xmlns:a16="http://schemas.microsoft.com/office/drawing/2014/main" id="{EE64177A-F9CF-424F-84AA-D8C843F1B4C4}"/>
-              </a:ext>
-            </a:extLst>
-          </p:cNvPr>
-          <p:cNvSpPr>
-            <a:spLocks noGrp="1"/>
-          </p:cNvSpPr>
-          <p:nvPr>
-            <p:ph type="title"/>
-          </p:nvPr>
-        </p:nvSpPr>
-        <p:spPr/>
-        <p:txBody>
-          <a:bodyPr/>
-          <a:lstStyle/>
-          <a:p>
-            <a:pPr algn="r"/>
-            <a:r>
-              <a:rPr lang="fa-IR" b="1" i="0" dirty="0">
-                <a:solidFill>
-                  <a:schemeClr val="accent1"/>
-                </a:solidFill>
-                <a:effectLst/>
-                <a:latin typeface="-apple-system"/>
-                <a:cs typeface="B Nazanin" panose="00000400000000000000" pitchFamily="2" charset="-78"/>
-              </a:rPr>
-              <a:t>وضعیت فعلی پروژه </a:t>
-            </a:r>
-            <a:br>
-              <a:rPr lang="fa-IR" b="1" i="0" dirty="0">
-                <a:solidFill>
-                  <a:schemeClr val="accent1"/>
-                </a:solidFill>
-                <a:effectLst/>
-                <a:latin typeface="-apple-system"/>
-                <a:cs typeface="B Nazanin" panose="00000400000000000000" pitchFamily="2" charset="-78"/>
-              </a:rPr>
-            </a:br>
-            <a:endParaRPr lang="en-US" dirty="0">
-              <a:solidFill>
-                <a:schemeClr val="accent1"/>
-              </a:solidFill>
-              <a:cs typeface="B Nazanin" panose="00000400000000000000" pitchFamily="2" charset="-78"/>
-            </a:endParaRPr>
-          </a:p>
-        </p:txBody>
-      </p:sp>
-      <p:sp>
-        <p:nvSpPr>
-          <p:cNvPr id="3" name="Content Placeholder 2">
-            <a:extLst>
-              <a:ext uri="{FF2B5EF4-FFF2-40B4-BE49-F238E27FC236}">
-                <a16:creationId xmlns:a16="http://schemas.microsoft.com/office/drawing/2014/main" id="{0619F152-B119-4B23-9A5D-EB233158E6F0}"/>
-              </a:ext>
-            </a:extLst>
-          </p:cNvPr>
-          <p:cNvSpPr>
-            <a:spLocks noGrp="1"/>
-          </p:cNvSpPr>
-          <p:nvPr>
-            <p:ph idx="1"/>
-          </p:nvPr>
-        </p:nvSpPr>
-        <p:spPr/>
-        <p:txBody>
-          <a:bodyPr>
-            <a:normAutofit/>
-          </a:bodyPr>
-          <a:lstStyle/>
-          <a:p>
-            <a:pPr algn="just" rtl="1"/>
-            <a:r>
-              <a:rPr lang="fa-IR" b="0" i="0" dirty="0">
-                <a:solidFill>
-                  <a:schemeClr val="tx1"/>
-                </a:solidFill>
-                <a:effectLst/>
-                <a:latin typeface="-apple-system"/>
-                <a:cs typeface="B Nazanin" panose="00000400000000000000" pitchFamily="2" charset="-78"/>
-              </a:rPr>
-              <a:t>اجرای روزانه با </a:t>
-            </a:r>
-            <a:r>
-              <a:rPr lang="en-US" b="0" i="0" dirty="0" err="1">
-                <a:solidFill>
-                  <a:schemeClr val="tx1"/>
-                </a:solidFill>
-                <a:effectLst/>
-                <a:latin typeface="-apple-system"/>
-                <a:cs typeface="B Nazanin" panose="00000400000000000000" pitchFamily="2" charset="-78"/>
-              </a:rPr>
-              <a:t>SchedulerAgent</a:t>
-            </a:r>
-            <a:r>
-              <a:rPr lang="en-US" b="0" i="0" dirty="0">
-                <a:solidFill>
-                  <a:schemeClr val="tx1"/>
-                </a:solidFill>
-                <a:effectLst/>
-                <a:latin typeface="-apple-system"/>
-                <a:cs typeface="B Nazanin" panose="00000400000000000000" pitchFamily="2" charset="-78"/>
-              </a:rPr>
-              <a:t> </a:t>
-            </a:r>
-            <a:r>
-              <a:rPr lang="fa-IR" b="0" i="0" dirty="0">
-                <a:solidFill>
-                  <a:schemeClr val="tx1"/>
-                </a:solidFill>
-                <a:effectLst/>
-                <a:latin typeface="-apple-system"/>
-                <a:cs typeface="B Nazanin" panose="00000400000000000000" pitchFamily="2" charset="-78"/>
-              </a:rPr>
-              <a:t>و قابلیت اجرای دستی با </a:t>
-            </a:r>
-            <a:r>
-              <a:rPr lang="en-US" b="0" i="0" dirty="0">
-                <a:solidFill>
-                  <a:schemeClr val="tx1"/>
-                </a:solidFill>
-                <a:effectLst/>
-                <a:latin typeface="-apple-system"/>
-                <a:cs typeface="B Nazanin" panose="00000400000000000000" pitchFamily="2" charset="-78"/>
-              </a:rPr>
-              <a:t>run-once</a:t>
-            </a:r>
-          </a:p>
-          <a:p>
-            <a:pPr algn="just" rtl="1"/>
-            <a:r>
-              <a:rPr lang="fa-IR" b="0" i="0" dirty="0">
-                <a:solidFill>
-                  <a:schemeClr val="tx1"/>
-                </a:solidFill>
-                <a:effectLst/>
-                <a:latin typeface="-apple-system"/>
-                <a:cs typeface="B Nazanin" panose="00000400000000000000" pitchFamily="2" charset="-78"/>
-              </a:rPr>
-              <a:t>تولید مقاله با </a:t>
-            </a:r>
-            <a:r>
-              <a:rPr lang="en-US" b="0" i="0" dirty="0">
-                <a:solidFill>
-                  <a:schemeClr val="tx1"/>
-                </a:solidFill>
-                <a:effectLst/>
-                <a:latin typeface="-apple-system"/>
-                <a:cs typeface="B Nazanin" panose="00000400000000000000" pitchFamily="2" charset="-78"/>
-              </a:rPr>
-              <a:t>Provider</a:t>
-            </a:r>
-            <a:r>
-              <a:rPr lang="fa-IR" b="0" i="0" dirty="0">
-                <a:solidFill>
-                  <a:schemeClr val="tx1"/>
-                </a:solidFill>
-                <a:effectLst/>
-                <a:latin typeface="-apple-system"/>
-                <a:cs typeface="B Nazanin" panose="00000400000000000000" pitchFamily="2" charset="-78"/>
-              </a:rPr>
-              <a:t>های </a:t>
-            </a:r>
-            <a:r>
-              <a:rPr lang="en-US" b="0" i="0" dirty="0" err="1">
-                <a:solidFill>
-                  <a:schemeClr val="tx1"/>
-                </a:solidFill>
-                <a:effectLst/>
-                <a:latin typeface="-apple-system"/>
-                <a:cs typeface="B Nazanin" panose="00000400000000000000" pitchFamily="2" charset="-78"/>
-              </a:rPr>
-              <a:t>OpenAI</a:t>
-            </a:r>
-            <a:r>
-              <a:rPr lang="en-US" b="0" i="0" dirty="0">
-                <a:solidFill>
-                  <a:schemeClr val="tx1"/>
-                </a:solidFill>
-                <a:effectLst/>
-                <a:latin typeface="-apple-system"/>
-                <a:cs typeface="B Nazanin" panose="00000400000000000000" pitchFamily="2" charset="-78"/>
-              </a:rPr>
-              <a:t>، </a:t>
-            </a:r>
-            <a:r>
-              <a:rPr lang="en-US" b="0" i="0" dirty="0" err="1">
-                <a:solidFill>
-                  <a:schemeClr val="tx1"/>
-                </a:solidFill>
-                <a:effectLst/>
-                <a:latin typeface="-apple-system"/>
-                <a:cs typeface="B Nazanin" panose="00000400000000000000" pitchFamily="2" charset="-78"/>
-              </a:rPr>
-              <a:t>Groq</a:t>
-            </a:r>
-            <a:r>
-              <a:rPr lang="en-US" b="0" i="0" dirty="0">
-                <a:solidFill>
-                  <a:schemeClr val="tx1"/>
-                </a:solidFill>
-                <a:effectLst/>
-                <a:latin typeface="-apple-system"/>
-                <a:cs typeface="B Nazanin" panose="00000400000000000000" pitchFamily="2" charset="-78"/>
-              </a:rPr>
-              <a:t> </a:t>
-            </a:r>
-            <a:r>
-              <a:rPr lang="fa-IR" b="0" i="0" dirty="0">
-                <a:solidFill>
-                  <a:schemeClr val="tx1"/>
-                </a:solidFill>
-                <a:effectLst/>
-                <a:latin typeface="-apple-system"/>
-                <a:cs typeface="B Nazanin" panose="00000400000000000000" pitchFamily="2" charset="-78"/>
-              </a:rPr>
-              <a:t>یا </a:t>
-            </a:r>
-            <a:r>
-              <a:rPr lang="en-US" b="0" i="0" dirty="0">
-                <a:solidFill>
-                  <a:schemeClr val="tx1"/>
-                </a:solidFill>
-                <a:effectLst/>
-                <a:latin typeface="-apple-system"/>
-                <a:cs typeface="B Nazanin" panose="00000400000000000000" pitchFamily="2" charset="-78"/>
-              </a:rPr>
-              <a:t>Fixture</a:t>
-            </a:r>
-          </a:p>
-          <a:p>
-            <a:pPr algn="just" rtl="1"/>
-            <a:r>
-              <a:rPr lang="fa-IR" b="0" i="0" dirty="0">
-                <a:solidFill>
-                  <a:schemeClr val="tx1"/>
-                </a:solidFill>
-                <a:effectLst/>
-                <a:latin typeface="-apple-system"/>
-                <a:cs typeface="B Nazanin" panose="00000400000000000000" pitchFamily="2" charset="-78"/>
-              </a:rPr>
-              <a:t>پیدا کردن یا تولید تصویر شاخص با </a:t>
-            </a:r>
-            <a:r>
-              <a:rPr lang="en-US" b="0" i="0" dirty="0" err="1">
-                <a:solidFill>
-                  <a:schemeClr val="tx1"/>
-                </a:solidFill>
-                <a:effectLst/>
-                <a:latin typeface="-apple-system"/>
-                <a:cs typeface="B Nazanin" panose="00000400000000000000" pitchFamily="2" charset="-78"/>
-              </a:rPr>
-              <a:t>SourcePageImages</a:t>
-            </a:r>
-            <a:r>
-              <a:rPr lang="en-US" b="0" i="0" dirty="0">
-                <a:solidFill>
-                  <a:schemeClr val="tx1"/>
-                </a:solidFill>
-                <a:effectLst/>
-                <a:latin typeface="-apple-system"/>
-                <a:cs typeface="B Nazanin" panose="00000400000000000000" pitchFamily="2" charset="-78"/>
-              </a:rPr>
-              <a:t>، </a:t>
-            </a:r>
-            <a:r>
-              <a:rPr lang="en-US" b="0" i="0" dirty="0" err="1">
-                <a:solidFill>
-                  <a:schemeClr val="tx1"/>
-                </a:solidFill>
-                <a:effectLst/>
-                <a:latin typeface="-apple-system"/>
-                <a:cs typeface="B Nazanin" panose="00000400000000000000" pitchFamily="2" charset="-78"/>
-              </a:rPr>
-              <a:t>OpenAI</a:t>
-            </a:r>
-            <a:r>
-              <a:rPr lang="en-US" b="0" i="0" dirty="0">
-                <a:solidFill>
-                  <a:schemeClr val="tx1"/>
-                </a:solidFill>
-                <a:effectLst/>
-                <a:latin typeface="-apple-system"/>
-                <a:cs typeface="B Nazanin" panose="00000400000000000000" pitchFamily="2" charset="-78"/>
-              </a:rPr>
-              <a:t>، Pollinations </a:t>
-            </a:r>
-            <a:r>
-              <a:rPr lang="fa-IR" b="0" i="0" dirty="0">
-                <a:solidFill>
-                  <a:schemeClr val="tx1"/>
-                </a:solidFill>
-                <a:effectLst/>
-                <a:latin typeface="-apple-system"/>
-                <a:cs typeface="B Nazanin" panose="00000400000000000000" pitchFamily="2" charset="-78"/>
-              </a:rPr>
-              <a:t>یا </a:t>
-            </a:r>
-            <a:r>
-              <a:rPr lang="en-US" b="0" i="0" dirty="0">
-                <a:solidFill>
-                  <a:schemeClr val="tx1"/>
-                </a:solidFill>
-                <a:effectLst/>
-                <a:latin typeface="-apple-system"/>
-                <a:cs typeface="B Nazanin" panose="00000400000000000000" pitchFamily="2" charset="-78"/>
-              </a:rPr>
-              <a:t>Fixture</a:t>
-            </a:r>
-          </a:p>
-          <a:p>
-            <a:pPr algn="just" rtl="1"/>
-            <a:r>
-              <a:rPr lang="fa-IR" b="0" i="0" dirty="0">
-                <a:solidFill>
-                  <a:schemeClr val="tx1"/>
-                </a:solidFill>
-                <a:effectLst/>
-                <a:latin typeface="-apple-system"/>
-                <a:cs typeface="B Nazanin" panose="00000400000000000000" pitchFamily="2" charset="-78"/>
-              </a:rPr>
-              <a:t>امکان غیرفعال‌کردن تصویر با </a:t>
-            </a:r>
-            <a:r>
-              <a:rPr lang="en-US" b="0" i="0" dirty="0" err="1">
-                <a:solidFill>
-                  <a:schemeClr val="tx1"/>
-                </a:solidFill>
-                <a:effectLst/>
-                <a:latin typeface="-apple-system"/>
-                <a:cs typeface="B Nazanin" panose="00000400000000000000" pitchFamily="2" charset="-78"/>
-              </a:rPr>
-              <a:t>ImageProvider</a:t>
-            </a:r>
-            <a:r>
-              <a:rPr lang="en-US" b="0" i="0" dirty="0">
-                <a:solidFill>
-                  <a:schemeClr val="tx1"/>
-                </a:solidFill>
-                <a:effectLst/>
-                <a:latin typeface="-apple-system"/>
-                <a:cs typeface="B Nazanin" panose="00000400000000000000" pitchFamily="2" charset="-78"/>
-              </a:rPr>
-              <a:t>: None</a:t>
-            </a:r>
-          </a:p>
-          <a:p>
-            <a:pPr algn="just" rtl="1"/>
-            <a:r>
-              <a:rPr lang="fa-IR" b="0" i="0" dirty="0">
-                <a:solidFill>
-                  <a:schemeClr val="tx1"/>
-                </a:solidFill>
-                <a:effectLst/>
-                <a:latin typeface="-apple-system"/>
-                <a:cs typeface="B Nazanin" panose="00000400000000000000" pitchFamily="2" charset="-78"/>
-              </a:rPr>
-              <a:t>انتشار مقاله در وردپرس با دسته‌بندی قابل تنظیم، تصویر شاخص، </a:t>
-            </a:r>
-            <a:r>
-              <a:rPr lang="en-US" b="0" i="0" dirty="0">
-                <a:solidFill>
-                  <a:schemeClr val="tx1"/>
-                </a:solidFill>
-                <a:effectLst/>
-                <a:latin typeface="-apple-system"/>
-                <a:cs typeface="B Nazanin" panose="00000400000000000000" pitchFamily="2" charset="-78"/>
-              </a:rPr>
-              <a:t>excerpt </a:t>
-            </a:r>
-            <a:r>
-              <a:rPr lang="fa-IR" b="0" i="0" dirty="0">
-                <a:solidFill>
-                  <a:schemeClr val="tx1"/>
-                </a:solidFill>
-                <a:effectLst/>
-                <a:latin typeface="-apple-system"/>
-                <a:cs typeface="B Nazanin" panose="00000400000000000000" pitchFamily="2" charset="-78"/>
-              </a:rPr>
-              <a:t>و لینک‌های داخلی</a:t>
-            </a:r>
-          </a:p>
-          <a:p>
-            <a:pPr algn="just" rtl="1"/>
-            <a:r>
-              <a:rPr lang="fa-IR" b="0" i="0" dirty="0">
-                <a:solidFill>
-                  <a:schemeClr val="tx1"/>
-                </a:solidFill>
-                <a:effectLst/>
-                <a:latin typeface="-apple-system"/>
-                <a:cs typeface="B Nazanin" panose="00000400000000000000" pitchFamily="2" charset="-78"/>
-              </a:rPr>
-              <a:t>انتشار خلاصه و لینک مطلب در تلگرام، همراه تصویر در صورت وجود</a:t>
-            </a:r>
-          </a:p>
-          <a:p>
-            <a:pPr algn="just" rtl="1"/>
-            <a:r>
-              <a:rPr lang="fa-IR" b="0" i="0" dirty="0">
-                <a:solidFill>
-                  <a:schemeClr val="tx1"/>
-                </a:solidFill>
-                <a:effectLst/>
-                <a:latin typeface="-apple-system"/>
-                <a:cs typeface="B Nazanin" panose="00000400000000000000" pitchFamily="2" charset="-78"/>
-              </a:rPr>
-              <a:t>انتشار پست تک‌تصویری در اینستاگرام وقتی تصویر عمومی از وردپرس در دسترس باشد</a:t>
-            </a:r>
-          </a:p>
-          <a:p>
-            <a:pPr algn="just" rtl="1"/>
-            <a:r>
-              <a:rPr lang="fa-IR" b="0" i="0" dirty="0">
-                <a:solidFill>
-                  <a:schemeClr val="tx1"/>
-                </a:solidFill>
-                <a:effectLst/>
-                <a:latin typeface="-apple-system"/>
-                <a:cs typeface="B Nazanin" panose="00000400000000000000" pitchFamily="2" charset="-78"/>
-              </a:rPr>
-              <a:t>تست لوکال با </a:t>
-            </a:r>
-            <a:r>
-              <a:rPr lang="en-US" b="0" i="0" dirty="0">
-                <a:solidFill>
-                  <a:schemeClr val="tx1"/>
-                </a:solidFill>
-                <a:effectLst/>
-                <a:latin typeface="-apple-system"/>
-                <a:cs typeface="B Nazanin" panose="00000400000000000000" pitchFamily="2" charset="-78"/>
-              </a:rPr>
-              <a:t>fixture </a:t>
-            </a:r>
-            <a:r>
-              <a:rPr lang="fa-IR" b="0" i="0" dirty="0">
-                <a:solidFill>
-                  <a:schemeClr val="tx1"/>
-                </a:solidFill>
-                <a:effectLst/>
-                <a:latin typeface="-apple-system"/>
-                <a:cs typeface="B Nazanin" panose="00000400000000000000" pitchFamily="2" charset="-78"/>
-              </a:rPr>
-              <a:t>بدون نیاز به اکانت </a:t>
-            </a:r>
-            <a:r>
-              <a:rPr lang="en-US" b="0" i="0" dirty="0">
-                <a:solidFill>
-                  <a:schemeClr val="tx1"/>
-                </a:solidFill>
-                <a:effectLst/>
-                <a:latin typeface="-apple-system"/>
-                <a:cs typeface="B Nazanin" panose="00000400000000000000" pitchFamily="2" charset="-78"/>
-              </a:rPr>
-              <a:t>LLM</a:t>
-            </a:r>
-          </a:p>
-          <a:p>
-            <a:pPr algn="just" rtl="1"/>
-            <a:r>
-              <a:rPr lang="fa-IR" b="0" i="0" dirty="0">
-                <a:solidFill>
-                  <a:schemeClr val="tx1"/>
-                </a:solidFill>
-                <a:effectLst/>
-                <a:latin typeface="-apple-system"/>
-                <a:cs typeface="B Nazanin" panose="00000400000000000000" pitchFamily="2" charset="-78"/>
-              </a:rPr>
-              <a:t>استقرار با </a:t>
-            </a:r>
-            <a:r>
-              <a:rPr lang="en-US" b="0" i="0" dirty="0">
-                <a:solidFill>
-                  <a:schemeClr val="tx1"/>
-                </a:solidFill>
-                <a:effectLst/>
-                <a:latin typeface="-apple-system"/>
-                <a:cs typeface="B Nazanin" panose="00000400000000000000" pitchFamily="2" charset="-78"/>
-              </a:rPr>
-              <a:t>Docker Compose </a:t>
-            </a:r>
-            <a:r>
-              <a:rPr lang="fa-IR" b="0" i="0" dirty="0">
-                <a:solidFill>
-                  <a:schemeClr val="tx1"/>
-                </a:solidFill>
-                <a:effectLst/>
-                <a:latin typeface="-apple-system"/>
-                <a:cs typeface="B Nazanin" panose="00000400000000000000" pitchFamily="2" charset="-78"/>
-              </a:rPr>
-              <a:t>روی سرور لینوکس</a:t>
-            </a:r>
-          </a:p>
-          <a:p>
-            <a:pPr algn="just" rtl="1"/>
-            <a:endParaRPr lang="fa-IR" b="0" i="0" dirty="0">
-              <a:solidFill>
-                <a:schemeClr val="tx1"/>
-              </a:solidFill>
-              <a:effectLst/>
-              <a:latin typeface="-apple-system"/>
-              <a:cs typeface="B Nazanin" panose="00000400000000000000" pitchFamily="2" charset="-78"/>
-            </a:endParaRPr>
-          </a:p>
-        </p:txBody>
-      </p:sp>
-      <p:sp>
-        <p:nvSpPr>
-          <p:cNvPr id="4" name="TextBox 3">
-            <a:extLst>
-              <a:ext uri="{FF2B5EF4-FFF2-40B4-BE49-F238E27FC236}">
-                <a16:creationId xmlns:a16="http://schemas.microsoft.com/office/drawing/2014/main" id="{6C93CE7F-C5BC-436B-850A-70561426A189}"/>
-              </a:ext>
-            </a:extLst>
-          </p:cNvPr>
-          <p:cNvSpPr txBox="1"/>
-          <p:nvPr/>
-        </p:nvSpPr>
-        <p:spPr>
-          <a:xfrm>
-            <a:off x="243840" y="751840"/>
-            <a:ext cx="528320" cy="369332"/>
-          </a:xfrm>
-          <a:prstGeom prst="rect">
-            <a:avLst/>
-          </a:prstGeom>
-          <a:noFill/>
-        </p:spPr>
-        <p:txBody>
-          <a:bodyPr wrap="square" rtlCol="0">
-            <a:spAutoFit/>
-          </a:bodyPr>
-          <a:lstStyle/>
-          <a:p>
-            <a:pPr algn="r" rtl="1"/>
-            <a:r>
-              <a:rPr lang="en-US" dirty="0">
-                <a:solidFill>
-                  <a:schemeClr val="bg1"/>
-                </a:solidFill>
-                <a:cs typeface="B Nazanin" panose="00000400000000000000" pitchFamily="2" charset="-78"/>
-              </a:rPr>
-              <a:t>3</a:t>
-            </a:r>
-          </a:p>
-        </p:txBody>
-      </p:sp>
-    </p:spTree>
-    <p:extLst>
-      <p:ext uri="{BB962C8B-B14F-4D97-AF65-F5344CB8AC3E}">
-        <p14:creationId xmlns:p14="http://schemas.microsoft.com/office/powerpoint/2010/main" val="1548641011"/>
+        <p14:creationId xmlns:p14="http://schemas.microsoft.com/office/powerpoint/2010/main" val="3686121221"/>
       </p:ext>
     </p:extLst>
   </p:cSld>
@@ -11072,8 +11217,18 @@
                 <a:latin typeface="-apple-system"/>
                 <a:cs typeface="B Nazanin" panose="00000400000000000000" pitchFamily="2" charset="-78"/>
               </a:rPr>
-              <a:t>یه کم از آخرش رو اول میگم</a:t>
-            </a:r>
+              <a:t>وضعیت فعلی پروژه </a:t>
+            </a:r>
+            <a:br>
+              <a:rPr lang="fa-IR" b="1" i="0" dirty="0">
+                <a:solidFill>
+                  <a:schemeClr val="accent1"/>
+                </a:solidFill>
+                <a:effectLst/>
+                <a:latin typeface="-apple-system"/>
+                <a:cs typeface="B Nazanin" panose="00000400000000000000" pitchFamily="2" charset="-78"/>
+              </a:rPr>
+            </a:br>
             <a:endParaRPr lang="en-US" dirty="0">
               <a:solidFill>
                 <a:schemeClr val="accent1"/>
@@ -11108,30 +11263,429 @@
           <a:p>
             <a:pPr algn="just" rtl="1"/>
             <a:r>
-              <a:rPr lang="fa-IR" sz="2400" b="0" i="0" dirty="0">
-                <a:solidFill>
-                  <a:schemeClr val="tx1"/>
-                </a:solidFill>
-                <a:effectLst/>
-                <a:latin typeface="-apple-system"/>
-                <a:cs typeface="B Nazanin" panose="00000400000000000000" pitchFamily="2" charset="-78"/>
-              </a:rPr>
-              <a:t>این فرمانی بود که آخرای پروژه برای تکمیل این داکیومنت اجرا شد که نکات مهمی رو در برمیگیرد</a:t>
+              <a:rPr lang="fa-IR" b="0" i="0" dirty="0">
+                <a:solidFill>
+                  <a:schemeClr val="tx1"/>
+                </a:solidFill>
+                <a:effectLst/>
+                <a:latin typeface="-apple-system"/>
+                <a:cs typeface="B Nazanin" panose="00000400000000000000" pitchFamily="2" charset="-78"/>
+              </a:rPr>
+              <a:t>اجرای روزانه با </a:t>
+            </a:r>
+            <a:r>
+              <a:rPr lang="en-US" b="0" i="0" dirty="0" err="1">
+                <a:solidFill>
+                  <a:schemeClr val="tx1"/>
+                </a:solidFill>
+                <a:effectLst/>
+                <a:latin typeface="-apple-system"/>
+                <a:cs typeface="B Nazanin" panose="00000400000000000000" pitchFamily="2" charset="-78"/>
+              </a:rPr>
+              <a:t>SchedulerAgent</a:t>
+            </a:r>
+            <a:r>
+              <a:rPr lang="en-US" b="0" i="0" dirty="0">
+                <a:solidFill>
+                  <a:schemeClr val="tx1"/>
+                </a:solidFill>
+                <a:effectLst/>
+                <a:latin typeface="-apple-system"/>
+                <a:cs typeface="B Nazanin" panose="00000400000000000000" pitchFamily="2" charset="-78"/>
+              </a:rPr>
+              <a:t> </a:t>
+            </a:r>
+            <a:r>
+              <a:rPr lang="fa-IR" b="0" i="0" dirty="0">
+                <a:solidFill>
+                  <a:schemeClr val="tx1"/>
+                </a:solidFill>
+                <a:effectLst/>
+                <a:latin typeface="-apple-system"/>
+                <a:cs typeface="B Nazanin" panose="00000400000000000000" pitchFamily="2" charset="-78"/>
+              </a:rPr>
+              <a:t>و قابلیت اجرای دستی با </a:t>
+            </a:r>
+            <a:r>
+              <a:rPr lang="en-US" b="0" i="0" dirty="0">
+                <a:solidFill>
+                  <a:schemeClr val="tx1"/>
+                </a:solidFill>
+                <a:effectLst/>
+                <a:latin typeface="-apple-system"/>
+                <a:cs typeface="B Nazanin" panose="00000400000000000000" pitchFamily="2" charset="-78"/>
+              </a:rPr>
+              <a:t>run-once</a:t>
             </a:r>
           </a:p>
           <a:p>
             <a:pPr algn="just" rtl="1"/>
-            <a:endParaRPr lang="fa-IR" sz="2400" dirty="0">
-              <a:solidFill>
-                <a:schemeClr val="tx1"/>
-              </a:solidFill>
-              <a:latin typeface="-apple-system"/>
-              <a:cs typeface="B Nazanin" panose="00000400000000000000" pitchFamily="2" charset="-78"/>
-            </a:endParaRPr>
+            <a:r>
+              <a:rPr lang="fa-IR" b="0" i="0" dirty="0">
+                <a:solidFill>
+                  <a:schemeClr val="tx1"/>
+                </a:solidFill>
+                <a:effectLst/>
+                <a:latin typeface="-apple-system"/>
+                <a:cs typeface="B Nazanin" panose="00000400000000000000" pitchFamily="2" charset="-78"/>
+              </a:rPr>
+              <a:t>تولید مقاله با </a:t>
+            </a:r>
+            <a:r>
+              <a:rPr lang="en-US" b="0" i="0" dirty="0">
+                <a:solidFill>
+                  <a:schemeClr val="tx1"/>
+                </a:solidFill>
+                <a:effectLst/>
+                <a:latin typeface="-apple-system"/>
+                <a:cs typeface="B Nazanin" panose="00000400000000000000" pitchFamily="2" charset="-78"/>
+              </a:rPr>
+              <a:t>Provider</a:t>
+            </a:r>
+            <a:r>
+              <a:rPr lang="fa-IR" b="0" i="0" dirty="0">
+                <a:solidFill>
+                  <a:schemeClr val="tx1"/>
+                </a:solidFill>
+                <a:effectLst/>
+                <a:latin typeface="-apple-system"/>
+                <a:cs typeface="B Nazanin" panose="00000400000000000000" pitchFamily="2" charset="-78"/>
+              </a:rPr>
+              <a:t>های </a:t>
+            </a:r>
+            <a:r>
+              <a:rPr lang="en-US" b="0" i="0" dirty="0" err="1">
+                <a:solidFill>
+                  <a:schemeClr val="tx1"/>
+                </a:solidFill>
+                <a:effectLst/>
+                <a:latin typeface="-apple-system"/>
+                <a:cs typeface="B Nazanin" panose="00000400000000000000" pitchFamily="2" charset="-78"/>
+              </a:rPr>
+              <a:t>OpenAI</a:t>
+            </a:r>
+            <a:r>
+              <a:rPr lang="en-US" b="0" i="0" dirty="0">
+                <a:solidFill>
+                  <a:schemeClr val="tx1"/>
+                </a:solidFill>
+                <a:effectLst/>
+                <a:latin typeface="-apple-system"/>
+                <a:cs typeface="B Nazanin" panose="00000400000000000000" pitchFamily="2" charset="-78"/>
+              </a:rPr>
+              <a:t>، </a:t>
+            </a:r>
+            <a:r>
+              <a:rPr lang="en-US" b="0" i="0" dirty="0" err="1">
+                <a:solidFill>
+                  <a:schemeClr val="tx1"/>
+                </a:solidFill>
+                <a:effectLst/>
+                <a:latin typeface="-apple-system"/>
+                <a:cs typeface="B Nazanin" panose="00000400000000000000" pitchFamily="2" charset="-78"/>
+              </a:rPr>
+              <a:t>Groq</a:t>
+            </a:r>
+            <a:r>
+              <a:rPr lang="en-US" b="0" i="0" dirty="0">
+                <a:solidFill>
+                  <a:schemeClr val="tx1"/>
+                </a:solidFill>
+                <a:effectLst/>
+                <a:latin typeface="-apple-system"/>
+                <a:cs typeface="B Nazanin" panose="00000400000000000000" pitchFamily="2" charset="-78"/>
+              </a:rPr>
+              <a:t> </a:t>
+            </a:r>
+            <a:r>
+              <a:rPr lang="fa-IR" b="0" i="0" dirty="0">
+                <a:solidFill>
+                  <a:schemeClr val="tx1"/>
+                </a:solidFill>
+                <a:effectLst/>
+                <a:latin typeface="-apple-system"/>
+                <a:cs typeface="B Nazanin" panose="00000400000000000000" pitchFamily="2" charset="-78"/>
+              </a:rPr>
+              <a:t>یا </a:t>
+            </a:r>
+            <a:r>
+              <a:rPr lang="en-US" b="0" i="0" dirty="0">
+                <a:solidFill>
+                  <a:schemeClr val="tx1"/>
+                </a:solidFill>
+                <a:effectLst/>
+                <a:latin typeface="-apple-system"/>
+                <a:cs typeface="B Nazanin" panose="00000400000000000000" pitchFamily="2" charset="-78"/>
+              </a:rPr>
+              <a:t>Fixture</a:t>
+            </a:r>
           </a:p>
           <a:p>
             <a:pPr algn="just" rtl="1"/>
-            <a:endParaRPr lang="fa-IR" sz="2400" b="0" i="0" dirty="0">
+            <a:r>
+              <a:rPr lang="fa-IR" b="0" i="0" dirty="0">
+                <a:solidFill>
+                  <a:schemeClr val="tx1"/>
+                </a:solidFill>
+                <a:effectLst/>
+                <a:latin typeface="-apple-system"/>
+                <a:cs typeface="B Nazanin" panose="00000400000000000000" pitchFamily="2" charset="-78"/>
+              </a:rPr>
+              <a:t>پیدا کردن یا تولید تصویر شاخص با </a:t>
+            </a:r>
+            <a:r>
+              <a:rPr lang="en-US" b="0" i="0" dirty="0" err="1">
+                <a:solidFill>
+                  <a:schemeClr val="tx1"/>
+                </a:solidFill>
+                <a:effectLst/>
+                <a:latin typeface="-apple-system"/>
+                <a:cs typeface="B Nazanin" panose="00000400000000000000" pitchFamily="2" charset="-78"/>
+              </a:rPr>
+              <a:t>SourcePageImages</a:t>
+            </a:r>
+            <a:r>
+              <a:rPr lang="en-US" b="0" i="0" dirty="0">
+                <a:solidFill>
+                  <a:schemeClr val="tx1"/>
+                </a:solidFill>
+                <a:effectLst/>
+                <a:latin typeface="-apple-system"/>
+                <a:cs typeface="B Nazanin" panose="00000400000000000000" pitchFamily="2" charset="-78"/>
+              </a:rPr>
+              <a:t>، </a:t>
+            </a:r>
+            <a:r>
+              <a:rPr lang="en-US" b="0" i="0" dirty="0" err="1">
+                <a:solidFill>
+                  <a:schemeClr val="tx1"/>
+                </a:solidFill>
+                <a:effectLst/>
+                <a:latin typeface="-apple-system"/>
+                <a:cs typeface="B Nazanin" panose="00000400000000000000" pitchFamily="2" charset="-78"/>
+              </a:rPr>
+              <a:t>OpenAI</a:t>
+            </a:r>
+            <a:r>
+              <a:rPr lang="en-US" b="0" i="0" dirty="0">
+                <a:solidFill>
+                  <a:schemeClr val="tx1"/>
+                </a:solidFill>
+                <a:effectLst/>
+                <a:latin typeface="-apple-system"/>
+                <a:cs typeface="B Nazanin" panose="00000400000000000000" pitchFamily="2" charset="-78"/>
+              </a:rPr>
+              <a:t>، Pollinations </a:t>
+            </a:r>
+            <a:r>
+              <a:rPr lang="fa-IR" b="0" i="0" dirty="0">
+                <a:solidFill>
+                  <a:schemeClr val="tx1"/>
+                </a:solidFill>
+                <a:effectLst/>
+                <a:latin typeface="-apple-system"/>
+                <a:cs typeface="B Nazanin" panose="00000400000000000000" pitchFamily="2" charset="-78"/>
+              </a:rPr>
+              <a:t>یا </a:t>
+            </a:r>
+            <a:r>
+              <a:rPr lang="en-US" b="0" i="0" dirty="0">
+                <a:solidFill>
+                  <a:schemeClr val="tx1"/>
+                </a:solidFill>
+                <a:effectLst/>
+                <a:latin typeface="-apple-system"/>
+                <a:cs typeface="B Nazanin" panose="00000400000000000000" pitchFamily="2" charset="-78"/>
+              </a:rPr>
+              <a:t>Fixture</a:t>
+            </a:r>
+          </a:p>
+          <a:p>
+            <a:pPr algn="just" rtl="1"/>
+            <a:r>
+              <a:rPr lang="fa-IR" b="0" i="0" dirty="0">
+                <a:solidFill>
+                  <a:schemeClr val="tx1"/>
+                </a:solidFill>
+                <a:effectLst/>
+                <a:latin typeface="-apple-system"/>
+                <a:cs typeface="B Nazanin" panose="00000400000000000000" pitchFamily="2" charset="-78"/>
+              </a:rPr>
+              <a:t>امکان غیرفعال‌کردن تصویر با </a:t>
+            </a:r>
+            <a:r>
+              <a:rPr lang="en-US" b="0" i="0" dirty="0" err="1">
+                <a:solidFill>
+                  <a:schemeClr val="tx1"/>
+                </a:solidFill>
+                <a:effectLst/>
+                <a:latin typeface="-apple-system"/>
+                <a:cs typeface="B Nazanin" panose="00000400000000000000" pitchFamily="2" charset="-78"/>
+              </a:rPr>
+              <a:t>ImageProvider</a:t>
+            </a:r>
+            <a:r>
+              <a:rPr lang="en-US" b="0" i="0" dirty="0">
+                <a:solidFill>
+                  <a:schemeClr val="tx1"/>
+                </a:solidFill>
+                <a:effectLst/>
+                <a:latin typeface="-apple-system"/>
+                <a:cs typeface="B Nazanin" panose="00000400000000000000" pitchFamily="2" charset="-78"/>
+              </a:rPr>
+              <a:t>: None</a:t>
+            </a:r>
+          </a:p>
+          <a:p>
+            <a:pPr algn="just" rtl="1"/>
+            <a:r>
+              <a:rPr lang="fa-IR" b="0" i="0" dirty="0">
+                <a:solidFill>
+                  <a:schemeClr val="tx1"/>
+                </a:solidFill>
+                <a:effectLst/>
+                <a:latin typeface="-apple-system"/>
+                <a:cs typeface="B Nazanin" panose="00000400000000000000" pitchFamily="2" charset="-78"/>
+              </a:rPr>
+              <a:t>انتشار مقاله در وردپرس با دسته‌بندی قابل تنظیم، تصویر شاخص، </a:t>
+            </a:r>
+            <a:r>
+              <a:rPr lang="en-US" b="0" i="0" dirty="0">
+                <a:solidFill>
+                  <a:schemeClr val="tx1"/>
+                </a:solidFill>
+                <a:effectLst/>
+                <a:latin typeface="-apple-system"/>
+                <a:cs typeface="B Nazanin" panose="00000400000000000000" pitchFamily="2" charset="-78"/>
+              </a:rPr>
+              <a:t>excerpt </a:t>
+            </a:r>
+            <a:r>
+              <a:rPr lang="fa-IR" b="0" i="0" dirty="0">
+                <a:solidFill>
+                  <a:schemeClr val="tx1"/>
+                </a:solidFill>
+                <a:effectLst/>
+                <a:latin typeface="-apple-system"/>
+                <a:cs typeface="B Nazanin" panose="00000400000000000000" pitchFamily="2" charset="-78"/>
+              </a:rPr>
+              <a:t>و لینک‌های داخلی</a:t>
+            </a:r>
+          </a:p>
+          <a:p>
+            <a:pPr algn="just" rtl="1"/>
+            <a:r>
+              <a:rPr lang="fa-IR" b="0" i="0" dirty="0">
+                <a:solidFill>
+                  <a:schemeClr val="tx1"/>
+                </a:solidFill>
+                <a:effectLst/>
+                <a:latin typeface="-apple-system"/>
+                <a:cs typeface="B Nazanin" panose="00000400000000000000" pitchFamily="2" charset="-78"/>
+              </a:rPr>
+              <a:t>انتشار خلاصه و لینک مطلب در تلگرام، همراه تصویر در صورت وجود</a:t>
+            </a:r>
+          </a:p>
+          <a:p>
+            <a:pPr algn="just" rtl="1"/>
+            <a:r>
+              <a:rPr lang="fa-IR" b="0" i="0" dirty="0">
+                <a:solidFill>
+                  <a:schemeClr val="tx1"/>
+                </a:solidFill>
+                <a:effectLst/>
+                <a:latin typeface="-apple-system"/>
+                <a:cs typeface="B Nazanin" panose="00000400000000000000" pitchFamily="2" charset="-78"/>
+              </a:rPr>
+              <a:t>انتشار پست تک‌تصویری در اینستاگرام وقتی تصویر عمومی از وردپرس در دسترس باشد</a:t>
+            </a:r>
+          </a:p>
+          <a:p>
+            <a:pPr algn="just" rtl="1"/>
+            <a:r>
+              <a:rPr lang="fa-IR" b="0" i="0" dirty="0">
+                <a:solidFill>
+                  <a:schemeClr val="tx1"/>
+                </a:solidFill>
+                <a:effectLst/>
+                <a:latin typeface="-apple-system"/>
+                <a:cs typeface="B Nazanin" panose="00000400000000000000" pitchFamily="2" charset="-78"/>
+              </a:rPr>
+              <a:t>تست لوکال با </a:t>
+            </a:r>
+            <a:r>
+              <a:rPr lang="en-US" b="0" i="0" dirty="0">
+                <a:solidFill>
+                  <a:schemeClr val="tx1"/>
+                </a:solidFill>
+                <a:effectLst/>
+                <a:latin typeface="-apple-system"/>
+                <a:cs typeface="B Nazanin" panose="00000400000000000000" pitchFamily="2" charset="-78"/>
+              </a:rPr>
+              <a:t>fixture </a:t>
+            </a:r>
+            <a:r>
+              <a:rPr lang="fa-IR" b="0" i="0" dirty="0">
+                <a:solidFill>
+                  <a:schemeClr val="tx1"/>
+                </a:solidFill>
+                <a:effectLst/>
+                <a:latin typeface="-apple-system"/>
+                <a:cs typeface="B Nazanin" panose="00000400000000000000" pitchFamily="2" charset="-78"/>
+              </a:rPr>
+              <a:t>بدون نیاز به اکانت </a:t>
+            </a:r>
+            <a:r>
+              <a:rPr lang="en-US" b="0" i="0" dirty="0">
+                <a:solidFill>
+                  <a:schemeClr val="tx1"/>
+                </a:solidFill>
+                <a:effectLst/>
+                <a:latin typeface="-apple-system"/>
+                <a:cs typeface="B Nazanin" panose="00000400000000000000" pitchFamily="2" charset="-78"/>
+              </a:rPr>
+              <a:t>LLM</a:t>
+            </a:r>
+          </a:p>
+          <a:p>
+            <a:pPr algn="just" rtl="1"/>
+            <a:r>
+              <a:rPr lang="fa-IR" b="0" i="0" dirty="0">
+                <a:solidFill>
+                  <a:schemeClr val="tx1"/>
+                </a:solidFill>
+                <a:effectLst/>
+                <a:latin typeface="-apple-system"/>
+                <a:cs typeface="B Nazanin" panose="00000400000000000000" pitchFamily="2" charset="-78"/>
+              </a:rPr>
+              <a:t>استقرار با </a:t>
+            </a:r>
+            <a:r>
+              <a:rPr lang="en-US" b="0" i="0" dirty="0">
+                <a:solidFill>
+                  <a:schemeClr val="tx1"/>
+                </a:solidFill>
+                <a:effectLst/>
+                <a:latin typeface="-apple-system"/>
+                <a:cs typeface="B Nazanin" panose="00000400000000000000" pitchFamily="2" charset="-78"/>
+              </a:rPr>
+              <a:t>Docker Compose </a:t>
+            </a:r>
+            <a:r>
+              <a:rPr lang="fa-IR" b="0" i="0" dirty="0">
+                <a:solidFill>
+                  <a:schemeClr val="tx1"/>
+                </a:solidFill>
+                <a:effectLst/>
+                <a:latin typeface="-apple-system"/>
+                <a:cs typeface="B Nazanin" panose="00000400000000000000" pitchFamily="2" charset="-78"/>
+              </a:rPr>
+              <a:t>روی سرور لینوکس</a:t>
+            </a:r>
+          </a:p>
+          <a:p>
+            <a:pPr algn="just" rtl="1"/>
+            <a:endParaRPr lang="fa-IR" b="0" i="0" dirty="0">
               <a:solidFill>
                 <a:schemeClr val="tx1"/>
               </a:solidFill>
@@ -11140,151 +11694,6 @@
               <a:cs typeface="B Nazanin" panose="00000400000000000000" pitchFamily="2" charset="-78"/>
             </a:endParaRPr>
           </a:p>
-          <a:p>
-            <a:pPr algn="just" rtl="1"/>
-            <a:r>
-              <a:rPr lang="fa-IR" sz="2400" b="0" i="0" dirty="0">
-                <a:solidFill>
-                  <a:schemeClr val="tx1"/>
-                </a:solidFill>
-                <a:effectLst/>
-                <a:latin typeface="-apple-system"/>
-                <a:cs typeface="B Nazanin" panose="00000400000000000000" pitchFamily="2" charset="-78"/>
-              </a:rPr>
-              <a:t>میخوام یک تحلیل روی فرمانهایی که من برای ساخت این پروژه دادم از روی فایل</a:t>
-            </a:r>
-            <a:br>
-              <a:rPr lang="en-US" sz="2400" b="0" i="0" dirty="0">
-                <a:solidFill>
-                  <a:schemeClr val="tx1"/>
-                </a:solidFill>
-                <a:effectLst/>
-                <a:latin typeface="-apple-system"/>
-                <a:cs typeface="B Nazanin" panose="00000400000000000000" pitchFamily="2" charset="-78"/>
-              </a:rPr>
-            </a:br>
-            <a:r>
-              <a:rPr lang="fa-IR" sz="2400" b="0" i="0" dirty="0">
-                <a:solidFill>
-                  <a:schemeClr val="tx1"/>
-                </a:solidFill>
-                <a:effectLst/>
-                <a:latin typeface="-apple-system"/>
-                <a:cs typeface="B Nazanin" panose="00000400000000000000" pitchFamily="2" charset="-78"/>
-              </a:rPr>
-              <a:t> </a:t>
-            </a:r>
-            <a:r>
-              <a:rPr lang="en-US" sz="2400" b="0" i="0" dirty="0">
-                <a:solidFill>
-                  <a:schemeClr val="tx1"/>
-                </a:solidFill>
-                <a:effectLst/>
-                <a:latin typeface="-apple-system"/>
-                <a:cs typeface="B Nazanin" panose="00000400000000000000" pitchFamily="2" charset="-78"/>
-              </a:rPr>
-              <a:t>project-journey-presentation-fa</a:t>
-            </a:r>
-            <a:r>
-              <a:rPr lang="fa-IR" sz="2400" b="0" i="0" dirty="0">
-                <a:solidFill>
-                  <a:schemeClr val="tx1"/>
-                </a:solidFill>
-                <a:effectLst/>
-                <a:latin typeface="-apple-system"/>
-                <a:cs typeface="B Nazanin" panose="00000400000000000000" pitchFamily="2" charset="-78"/>
-              </a:rPr>
-              <a:t> </a:t>
-            </a:r>
-            <a:r>
-              <a:rPr lang="en-US" sz="2400" b="0" i="0" dirty="0">
-                <a:solidFill>
-                  <a:schemeClr val="tx1"/>
-                </a:solidFill>
-                <a:effectLst/>
-                <a:latin typeface="-apple-system"/>
-                <a:cs typeface="B Nazanin" panose="00000400000000000000" pitchFamily="2" charset="-78"/>
-              </a:rPr>
-              <a:t>   </a:t>
-            </a:r>
-            <a:r>
-              <a:rPr lang="fa-IR" sz="2400" b="0" i="0" dirty="0">
-                <a:solidFill>
-                  <a:schemeClr val="tx1"/>
-                </a:solidFill>
-                <a:effectLst/>
-                <a:latin typeface="-apple-system"/>
-                <a:cs typeface="B Nazanin" panose="00000400000000000000" pitchFamily="2" charset="-78"/>
-              </a:rPr>
-              <a:t>بدون خواندن کل فرمانها از هیستوری و  </a:t>
-            </a:r>
-            <a:r>
-              <a:rPr lang="en-US" sz="2400" b="0" i="0" dirty="0">
-                <a:solidFill>
-                  <a:schemeClr val="tx1"/>
-                </a:solidFill>
-                <a:effectLst/>
-                <a:latin typeface="-apple-system"/>
-                <a:cs typeface="B Nazanin" panose="00000400000000000000" pitchFamily="2" charset="-78"/>
-              </a:rPr>
-              <a:t>commit</a:t>
-            </a:r>
-            <a:r>
-              <a:rPr lang="fa-IR" sz="2400" b="0" i="0" dirty="0">
-                <a:solidFill>
-                  <a:schemeClr val="tx1"/>
-                </a:solidFill>
-                <a:effectLst/>
-                <a:latin typeface="-apple-system"/>
-                <a:cs typeface="B Nazanin" panose="00000400000000000000" pitchFamily="2" charset="-78"/>
-              </a:rPr>
-              <a:t>  </a:t>
-            </a:r>
-            <a:r>
-              <a:rPr lang="en-US" sz="2400" b="0" i="0" dirty="0">
-                <a:solidFill>
-                  <a:schemeClr val="tx1"/>
-                </a:solidFill>
-                <a:effectLst/>
-                <a:latin typeface="-apple-system"/>
-                <a:cs typeface="B Nazanin" panose="00000400000000000000" pitchFamily="2" charset="-78"/>
-              </a:rPr>
-              <a:t> </a:t>
-            </a:r>
-            <a:r>
-              <a:rPr lang="fa-IR" sz="2400" b="0" i="0" dirty="0">
-                <a:solidFill>
-                  <a:schemeClr val="tx1"/>
-                </a:solidFill>
-                <a:effectLst/>
-                <a:latin typeface="-apple-system"/>
-                <a:cs typeface="B Nazanin" panose="00000400000000000000" pitchFamily="2" charset="-78"/>
-              </a:rPr>
-              <a:t> </a:t>
-            </a:r>
-            <a:r>
-              <a:rPr lang="en-US" sz="2400" b="0" i="0" dirty="0">
-                <a:solidFill>
-                  <a:schemeClr val="tx1"/>
-                </a:solidFill>
-                <a:effectLst/>
-                <a:latin typeface="-apple-system"/>
-                <a:cs typeface="B Nazanin" panose="00000400000000000000" pitchFamily="2" charset="-78"/>
-              </a:rPr>
-              <a:t>,.. </a:t>
-            </a:r>
-            <a:r>
-              <a:rPr lang="fa-IR" sz="2400" b="0" i="0" dirty="0">
-                <a:solidFill>
-                  <a:schemeClr val="tx1"/>
-                </a:solidFill>
-                <a:effectLst/>
-                <a:latin typeface="-apple-system"/>
-                <a:cs typeface="B Nazanin" panose="00000400000000000000" pitchFamily="2" charset="-78"/>
-              </a:rPr>
-              <a:t>انجام بدی و نقاط قوت و ضعف فرمانهایی که منجر به طراحی معماری حرفه ای و جلوگیری از بروز خطاهای آینده و رسیدن به نتیجه مناسسب بودند رو استخراج کنی و به مقدمه همین فایل اضافه کنی. مُجازی از من تعریف کنی و خوب بگی :)</a:t>
-            </a:r>
-          </a:p>
         </p:txBody>
       </p:sp>
       <p:sp>
@@ -11292,7 +11701,7 @@
           <p:cNvPr id="4" name="TextBox 3">
             <a:extLst>
               <a:ext uri="{FF2B5EF4-FFF2-40B4-BE49-F238E27FC236}">
-                <a16:creationId xmlns:a16="http://schemas.microsoft.com/office/drawing/2014/main" id="{527E7C9C-56F3-4625-B8F3-C7FFEE5DB49C}"/>
+                <a16:creationId xmlns:a16="http://schemas.microsoft.com/office/drawing/2014/main" id="{6C93CE7F-C5BC-436B-850A-70561426A189}"/>
               </a:ext>
             </a:extLst>
           </p:cNvPr>
@@ -11323,7 +11732,7 @@
                 </a:solidFill>
                 <a:cs typeface="B Nazanin" panose="00000400000000000000" pitchFamily="2" charset="-78"/>
               </a:rPr>
-              <a:t>4</a:t>
+              <a:t>3</a:t>
             </a:r>
           </a:p>
         </p:txBody>
@@ -11331,7 +11740,7 @@
     </p:spTree>
     <p:extLst>
       <p:ext uri="{BB962C8B-B14F-4D97-AF65-F5344CB8AC3E}">
-        <p14:creationId xmlns:p14="http://schemas.microsoft.com/office/powerpoint/2010/main" val="1783508363"/>
+        <p14:creationId xmlns:p14="http://schemas.microsoft.com/office/powerpoint/2010/main" val="1548641011"/>
       </p:ext>
     </p:extLst>
   </p:cSld>
@@ -11389,7 +11798,7 @@
                 <a:latin typeface="-apple-system"/>
                 <a:cs typeface="B Nazanin" panose="00000400000000000000" pitchFamily="2" charset="-78"/>
               </a:rPr>
-              <a:t>تحلیل سبک فرمان‌دهی </a:t>
+              <a:t>یه کم از آخرش رو اول میگم</a:t>
             </a:r>
             <a:endParaRPr lang="en-US" dirty="0">
               <a:solidFill>
@@ -11419,301 +11828,197 @@
         <p:spPr/>
         <p:txBody>
           <a:bodyPr>
-            <a:noAutofit/>
+            <a:normAutofit/>
           </a:bodyPr>
           <a:lstStyle/>
           <a:p>
             <a:pPr algn="just" rtl="1"/>
             <a:r>
-              <a:rPr lang="fa-IR" b="0" i="0" dirty="0">
-                <a:solidFill>
-                  <a:schemeClr val="tx1"/>
-                </a:solidFill>
-                <a:effectLst/>
-                <a:latin typeface="-apple-system"/>
-                <a:cs typeface="B Nazanin" panose="00000400000000000000" pitchFamily="2" charset="-78"/>
-              </a:rPr>
-              <a:t>یکی از نکات برجسته این پروژه این است که مسیر آن فقط با «درخواست ساخت فیچر» جلو نرفت؛ فرمان‌ها به‌تدریج معماری را شکل دادند. کاربر از همان ابتدا پروژه را با یک نگاه محصولی و اجرایی هدایت کرد: اول مستندات و </a:t>
-            </a:r>
-            <a:r>
-              <a:rPr lang="en-US" b="0" i="0" dirty="0">
-                <a:solidFill>
-                  <a:schemeClr val="tx1"/>
-                </a:solidFill>
-                <a:effectLst/>
-                <a:latin typeface="-apple-system"/>
-                <a:cs typeface="B Nazanin" panose="00000400000000000000" pitchFamily="2" charset="-78"/>
-              </a:rPr>
-              <a:t>GitHub، </a:t>
-            </a:r>
-            <a:r>
-              <a:rPr lang="fa-IR" b="0" i="0" dirty="0">
-                <a:solidFill>
-                  <a:schemeClr val="tx1"/>
-                </a:solidFill>
-                <a:effectLst/>
-                <a:latin typeface="-apple-system"/>
-                <a:cs typeface="B Nazanin" panose="00000400000000000000" pitchFamily="2" charset="-78"/>
-              </a:rPr>
-              <a:t>بعد </a:t>
-            </a:r>
-            <a:r>
-              <a:rPr lang="en-US" b="0" i="0" dirty="0">
-                <a:solidFill>
-                  <a:schemeClr val="tx1"/>
-                </a:solidFill>
-                <a:effectLst/>
-                <a:latin typeface="-apple-system"/>
-                <a:cs typeface="B Nazanin" panose="00000400000000000000" pitchFamily="2" charset="-78"/>
-              </a:rPr>
-              <a:t>MVP </a:t>
-            </a:r>
-            <a:r>
-              <a:rPr lang="fa-IR" b="0" i="0" dirty="0">
-                <a:solidFill>
-                  <a:schemeClr val="tx1"/>
-                </a:solidFill>
-                <a:effectLst/>
-                <a:latin typeface="-apple-system"/>
-                <a:cs typeface="B Nazanin" panose="00000400000000000000" pitchFamily="2" charset="-78"/>
-              </a:rPr>
-              <a:t>کوچک، بعد تست محلی، بعد انتشار واقعی، بعد مدیریت خطاها، بعد </a:t>
-            </a:r>
-            <a:r>
-              <a:rPr lang="en-US" b="0" i="0" dirty="0">
-                <a:solidFill>
-                  <a:schemeClr val="tx1"/>
-                </a:solidFill>
-                <a:effectLst/>
-                <a:latin typeface="-apple-system"/>
-                <a:cs typeface="B Nazanin" panose="00000400000000000000" pitchFamily="2" charset="-78"/>
-              </a:rPr>
-              <a:t>Provider</a:t>
-            </a:r>
-            <a:r>
-              <a:rPr lang="fa-IR" b="0" i="0" dirty="0">
-                <a:solidFill>
-                  <a:schemeClr val="tx1"/>
-                </a:solidFill>
-                <a:effectLst/>
-                <a:latin typeface="-apple-system"/>
-                <a:cs typeface="B Nazanin" panose="00000400000000000000" pitchFamily="2" charset="-78"/>
-              </a:rPr>
-              <a:t>ها، و در نهایت آماده‌سازی برای </a:t>
-            </a:r>
-            <a:r>
-              <a:rPr lang="en-US" b="0" i="0" dirty="0">
-                <a:solidFill>
-                  <a:schemeClr val="tx1"/>
-                </a:solidFill>
-                <a:effectLst/>
-                <a:latin typeface="-apple-system"/>
-                <a:cs typeface="B Nazanin" panose="00000400000000000000" pitchFamily="2" charset="-78"/>
-              </a:rPr>
-              <a:t>production. </a:t>
-            </a:r>
-            <a:r>
-              <a:rPr lang="fa-IR" b="0" i="0" dirty="0">
-                <a:solidFill>
-                  <a:schemeClr val="tx1"/>
-                </a:solidFill>
-                <a:effectLst/>
-                <a:latin typeface="-apple-system"/>
-                <a:cs typeface="B Nazanin" panose="00000400000000000000" pitchFamily="2" charset="-78"/>
-              </a:rPr>
-              <a:t>این ترتیب، بسیار حرفه‌ای بود؛ چون پروژه را از افتادن در دام طراحی بزرگ و دیررس نجات داد و سریع به خروجی قابل اجرا رساند.</a:t>
+              <a:rPr lang="fa-IR" sz="2400" b="0" i="0" dirty="0">
+                <a:solidFill>
+                  <a:schemeClr val="tx1"/>
+                </a:solidFill>
+                <a:effectLst/>
+                <a:latin typeface="-apple-system"/>
+                <a:cs typeface="B Nazanin" panose="00000400000000000000" pitchFamily="2" charset="-78"/>
+              </a:rPr>
+              <a:t>این فرمانی بود که آخرای پروژه برای تکمیل این داکیومنت اجرا شد که نکات مهمی رو در برمیگیرد</a:t>
             </a:r>
           </a:p>
           <a:p>
             <a:pPr algn="just" rtl="1"/>
-            <a:r>
-              <a:rPr lang="fa-IR" b="0" i="0" dirty="0">
-                <a:solidFill>
-                  <a:schemeClr val="tx1"/>
-                </a:solidFill>
-                <a:effectLst/>
-                <a:latin typeface="-apple-system"/>
-                <a:cs typeface="B Nazanin" panose="00000400000000000000" pitchFamily="2" charset="-78"/>
-              </a:rPr>
-              <a:t>نقطه قوت مهم دیگر، تأکید مداوم روی حداقل نیاز واقعی بود. درخواست‌هایی مثل «دیتابیس لازم نداریم»، «لاک دیتابیسی مهم نیست»، «این نسخه اولیه است»، و «کد واقعی اما با حداقل نیازها» باعث شد </a:t>
-            </a:r>
-            <a:r>
-              <a:rPr lang="en-US" b="0" i="0" dirty="0">
-                <a:solidFill>
-                  <a:schemeClr val="tx1"/>
-                </a:solidFill>
-                <a:effectLst/>
-                <a:latin typeface="-apple-system"/>
-                <a:cs typeface="B Nazanin" panose="00000400000000000000" pitchFamily="2" charset="-78"/>
-              </a:rPr>
-              <a:t>MVP </a:t>
-            </a:r>
-            <a:r>
-              <a:rPr lang="fa-IR" b="0" i="0" dirty="0">
-                <a:solidFill>
-                  <a:schemeClr val="tx1"/>
-                </a:solidFill>
-                <a:effectLst/>
-                <a:latin typeface="-apple-system"/>
-                <a:cs typeface="B Nazanin" panose="00000400000000000000" pitchFamily="2" charset="-78"/>
-              </a:rPr>
-              <a:t>سبک بماند. این تصمیم‌ها از جنس تصمیم‌های یک مدیر فنی خوب هستند: اول ارزش واقعی را بساز، بعد پیچیدگی را فقط وقتی اضافه کن که مسئله‌اش واقعاً ظاهر شده باشد.</a:t>
-            </a:r>
+            <a:endParaRPr lang="fa-IR" sz="2400" dirty="0">
+              <a:solidFill>
+                <a:schemeClr val="tx1"/>
+              </a:solidFill>
+              <a:latin typeface="-apple-system"/>
+              <a:cs typeface="B Nazanin" panose="00000400000000000000" pitchFamily="2" charset="-78"/>
+            </a:endParaRPr>
           </a:p>
           <a:p>
             <a:pPr algn="just" rtl="1"/>
-            <a:r>
-              <a:rPr lang="fa-IR" b="0" i="0" dirty="0">
-                <a:solidFill>
-                  <a:schemeClr val="tx1"/>
-                </a:solidFill>
-                <a:effectLst/>
-                <a:latin typeface="-apple-system"/>
-                <a:cs typeface="B Nazanin" panose="00000400000000000000" pitchFamily="2" charset="-78"/>
-              </a:rPr>
-              <a:t>در ادامه، فرمان‌ها به‌جای اینکه فقط ظاهر پروژه را کامل کنند، نقاط شکست آینده را زود آشکار کردند. درخواست اجرای دستی، </a:t>
-            </a:r>
-            <a:r>
-              <a:rPr lang="en-US" b="0" i="0" dirty="0">
-                <a:solidFill>
-                  <a:schemeClr val="tx1"/>
-                </a:solidFill>
-                <a:effectLst/>
-                <a:latin typeface="-apple-system"/>
-                <a:cs typeface="B Nazanin" panose="00000400000000000000" pitchFamily="2" charset="-78"/>
-              </a:rPr>
-              <a:t>fixture، </a:t>
-            </a:r>
-            <a:r>
-              <a:rPr lang="fa-IR" b="0" i="0" dirty="0">
-                <a:solidFill>
-                  <a:schemeClr val="tx1"/>
-                </a:solidFill>
-                <a:effectLst/>
-                <a:latin typeface="-apple-system"/>
-                <a:cs typeface="B Nazanin" panose="00000400000000000000" pitchFamily="2" charset="-78"/>
-              </a:rPr>
-              <a:t>اسکریپت‌های لوکال، جدا کردن </a:t>
-            </a:r>
-            <a:r>
-              <a:rPr lang="en-US" b="0" i="0" dirty="0">
-                <a:solidFill>
-                  <a:schemeClr val="tx1"/>
-                </a:solidFill>
-                <a:effectLst/>
-                <a:latin typeface="-apple-system"/>
-                <a:cs typeface="B Nazanin" panose="00000400000000000000" pitchFamily="2" charset="-78"/>
-              </a:rPr>
-              <a:t>secret</a:t>
-            </a:r>
-            <a:r>
-              <a:rPr lang="fa-IR" b="0" i="0" dirty="0">
-                <a:solidFill>
-                  <a:schemeClr val="tx1"/>
-                </a:solidFill>
-                <a:effectLst/>
-                <a:latin typeface="-apple-system"/>
-                <a:cs typeface="B Nazanin" panose="00000400000000000000" pitchFamily="2" charset="-78"/>
-              </a:rPr>
-              <a:t>ها، </a:t>
-            </a:r>
-            <a:r>
-              <a:rPr lang="en-US" b="0" i="0" dirty="0">
-                <a:solidFill>
-                  <a:schemeClr val="tx1"/>
-                </a:solidFill>
-                <a:effectLst/>
-                <a:latin typeface="-apple-system"/>
-                <a:cs typeface="B Nazanin" panose="00000400000000000000" pitchFamily="2" charset="-78"/>
-              </a:rPr>
-              <a:t>draft </a:t>
-            </a:r>
-            <a:r>
-              <a:rPr lang="fa-IR" b="0" i="0" dirty="0">
-                <a:solidFill>
-                  <a:schemeClr val="tx1"/>
-                </a:solidFill>
-                <a:effectLst/>
-                <a:latin typeface="-apple-system"/>
-                <a:cs typeface="B Nazanin" panose="00000400000000000000" pitchFamily="2" charset="-78"/>
-              </a:rPr>
-              <a:t>شدن وردپرس، و ادامه </a:t>
-            </a:r>
-            <a:r>
-              <a:rPr lang="en-US" b="0" i="0" dirty="0">
-                <a:solidFill>
-                  <a:schemeClr val="tx1"/>
-                </a:solidFill>
-                <a:effectLst/>
-                <a:latin typeface="-apple-system"/>
-                <a:cs typeface="B Nazanin" panose="00000400000000000000" pitchFamily="2" charset="-78"/>
-              </a:rPr>
-              <a:t>workflow </a:t>
-            </a:r>
-            <a:r>
-              <a:rPr lang="fa-IR" b="0" i="0" dirty="0">
-                <a:solidFill>
-                  <a:schemeClr val="tx1"/>
-                </a:solidFill>
-                <a:effectLst/>
-                <a:latin typeface="-apple-system"/>
-                <a:cs typeface="B Nazanin" panose="00000400000000000000" pitchFamily="2" charset="-78"/>
-              </a:rPr>
-              <a:t>بدون تصویر، همگی نشان می‌دهند که کاربر پروژه را فقط برای «کار کردن در حالت ایده‌آل» نمی‌خواست؛ بلکه دنبال سیستمی بود که در شرایط واقعی، با خطاهای </a:t>
-            </a:r>
-            <a:r>
-              <a:rPr lang="en-US" b="0" i="0" dirty="0">
-                <a:solidFill>
-                  <a:schemeClr val="tx1"/>
-                </a:solidFill>
-                <a:effectLst/>
-                <a:latin typeface="-apple-system"/>
-                <a:cs typeface="B Nazanin" panose="00000400000000000000" pitchFamily="2" charset="-78"/>
-              </a:rPr>
-              <a:t>API، </a:t>
-            </a:r>
-            <a:r>
-              <a:rPr lang="fa-IR" b="0" i="0" dirty="0">
-                <a:solidFill>
-                  <a:schemeClr val="tx1"/>
-                </a:solidFill>
-                <a:effectLst/>
-                <a:latin typeface="-apple-system"/>
-                <a:cs typeface="B Nazanin" panose="00000400000000000000" pitchFamily="2" charset="-78"/>
-              </a:rPr>
-              <a:t>محدودیت اکانت‌ها، مشکل وردپرس، نبود تصویر و تفاوت مدل‌های هوش مصنوعی هم دوام بیاورد. همین نگاه، پروژه را از یک نمونه نمایشی به یک </a:t>
-            </a:r>
-            <a:r>
-              <a:rPr lang="en-US" b="0" i="0" dirty="0">
-                <a:solidFill>
-                  <a:schemeClr val="tx1"/>
-                </a:solidFill>
-                <a:effectLst/>
-                <a:latin typeface="-apple-system"/>
-                <a:cs typeface="B Nazanin" panose="00000400000000000000" pitchFamily="2" charset="-78"/>
-              </a:rPr>
-              <a:t>MVP </a:t>
-            </a:r>
-            <a:r>
-              <a:rPr lang="fa-IR" b="0" i="0" dirty="0">
-                <a:solidFill>
-                  <a:schemeClr val="tx1"/>
-                </a:solidFill>
-                <a:effectLst/>
-                <a:latin typeface="-apple-system"/>
-                <a:cs typeface="B Nazanin" panose="00000400000000000000" pitchFamily="2" charset="-78"/>
-              </a:rPr>
-              <a:t>قابل اتکا نزدیک کرد.</a:t>
+            <a:endParaRPr lang="fa-IR" sz="2400" b="0" i="0" dirty="0">
+              <a:solidFill>
+                <a:schemeClr val="tx1"/>
+              </a:solidFill>
+              <a:effectLst/>
+              <a:latin typeface="-apple-system"/>
+              <a:cs typeface="B Nazanin" panose="00000400000000000000" pitchFamily="2" charset="-78"/>
+            </a:endParaRPr>
+          </a:p>
+          <a:p>
+            <a:pPr algn="just" rtl="1"/>
+            <a:r>
+              <a:rPr lang="fa-IR" sz="2400" b="0" i="0" dirty="0">
+                <a:solidFill>
+                  <a:schemeClr val="tx1"/>
+                </a:solidFill>
+                <a:effectLst/>
+                <a:latin typeface="-apple-system"/>
+                <a:cs typeface="B Nazanin" panose="00000400000000000000" pitchFamily="2" charset="-78"/>
+              </a:rPr>
+              <a:t>میخوام یک تحلیل روی فرمانهایی که من برای ساخت این پروژه دادم از روی فایل</a:t>
+            </a:r>
+            <a:br>
+              <a:rPr lang="en-US" sz="2400" b="0" i="0" dirty="0">
+                <a:solidFill>
+                  <a:schemeClr val="tx1"/>
+                </a:solidFill>
+                <a:effectLst/>
+                <a:latin typeface="-apple-system"/>
+                <a:cs typeface="B Nazanin" panose="00000400000000000000" pitchFamily="2" charset="-78"/>
+              </a:rPr>
+            </a:br>
+            <a:r>
+              <a:rPr lang="fa-IR" sz="2400" b="0" i="0" dirty="0">
+                <a:solidFill>
+                  <a:schemeClr val="tx1"/>
+                </a:solidFill>
+                <a:effectLst/>
+                <a:latin typeface="-apple-system"/>
+                <a:cs typeface="B Nazanin" panose="00000400000000000000" pitchFamily="2" charset="-78"/>
+              </a:rPr>
+              <a:t> </a:t>
+            </a:r>
+            <a:r>
+              <a:rPr lang="en-US" sz="2400" b="0" i="0" dirty="0">
+                <a:solidFill>
+                  <a:schemeClr val="tx1"/>
+                </a:solidFill>
+                <a:effectLst/>
+                <a:latin typeface="-apple-system"/>
+                <a:cs typeface="B Nazanin" panose="00000400000000000000" pitchFamily="2" charset="-78"/>
+              </a:rPr>
+              <a:t>project-journey-presentation-fa</a:t>
+            </a:r>
+            <a:r>
+              <a:rPr lang="fa-IR" sz="2400" b="0" i="0" dirty="0">
+                <a:solidFill>
+                  <a:schemeClr val="tx1"/>
+                </a:solidFill>
+                <a:effectLst/>
+                <a:latin typeface="-apple-system"/>
+                <a:cs typeface="B Nazanin" panose="00000400000000000000" pitchFamily="2" charset="-78"/>
+              </a:rPr>
+              <a:t> </a:t>
+            </a:r>
+            <a:r>
+              <a:rPr lang="en-US" sz="2400" b="0" i="0" dirty="0">
+                <a:solidFill>
+                  <a:schemeClr val="tx1"/>
+                </a:solidFill>
+                <a:effectLst/>
+                <a:latin typeface="-apple-system"/>
+                <a:cs typeface="B Nazanin" panose="00000400000000000000" pitchFamily="2" charset="-78"/>
+              </a:rPr>
+              <a:t>   </a:t>
+            </a:r>
+            <a:r>
+              <a:rPr lang="fa-IR" sz="2400" b="0" i="0" dirty="0">
+                <a:solidFill>
+                  <a:schemeClr val="tx1"/>
+                </a:solidFill>
+                <a:effectLst/>
+                <a:latin typeface="-apple-system"/>
+                <a:cs typeface="B Nazanin" panose="00000400000000000000" pitchFamily="2" charset="-78"/>
+              </a:rPr>
+              <a:t>بدون خواندن کل فرمانها از هیستوری و  </a:t>
+            </a:r>
+            <a:r>
+              <a:rPr lang="en-US" sz="2400" b="0" i="0" dirty="0">
+                <a:solidFill>
+                  <a:schemeClr val="tx1"/>
+                </a:solidFill>
+                <a:effectLst/>
+                <a:latin typeface="-apple-system"/>
+                <a:cs typeface="B Nazanin" panose="00000400000000000000" pitchFamily="2" charset="-78"/>
+              </a:rPr>
+              <a:t>commit</a:t>
+            </a:r>
+            <a:r>
+              <a:rPr lang="fa-IR" sz="2400" b="0" i="0" dirty="0">
+                <a:solidFill>
+                  <a:schemeClr val="tx1"/>
+                </a:solidFill>
+                <a:effectLst/>
+                <a:latin typeface="-apple-system"/>
+                <a:cs typeface="B Nazanin" panose="00000400000000000000" pitchFamily="2" charset="-78"/>
+              </a:rPr>
+              <a:t>  </a:t>
+            </a:r>
+            <a:r>
+              <a:rPr lang="en-US" sz="2400" b="0" i="0" dirty="0">
+                <a:solidFill>
+                  <a:schemeClr val="tx1"/>
+                </a:solidFill>
+                <a:effectLst/>
+                <a:latin typeface="-apple-system"/>
+                <a:cs typeface="B Nazanin" panose="00000400000000000000" pitchFamily="2" charset="-78"/>
+              </a:rPr>
+              <a:t> </a:t>
+            </a:r>
+            <a:r>
+              <a:rPr lang="fa-IR" sz="2400" b="0" i="0" dirty="0">
+                <a:solidFill>
+                  <a:schemeClr val="tx1"/>
+                </a:solidFill>
+                <a:effectLst/>
+                <a:latin typeface="-apple-system"/>
+                <a:cs typeface="B Nazanin" panose="00000400000000000000" pitchFamily="2" charset="-78"/>
+              </a:rPr>
+              <a:t> </a:t>
+            </a:r>
+            <a:r>
+              <a:rPr lang="en-US" sz="2400" b="0" i="0" dirty="0">
+                <a:solidFill>
+                  <a:schemeClr val="tx1"/>
+                </a:solidFill>
+                <a:effectLst/>
+                <a:latin typeface="-apple-system"/>
+                <a:cs typeface="B Nazanin" panose="00000400000000000000" pitchFamily="2" charset="-78"/>
+              </a:rPr>
+              <a:t>,.. </a:t>
+            </a:r>
+            <a:r>
+              <a:rPr lang="fa-IR" sz="2400" b="0" i="0" dirty="0">
+                <a:solidFill>
+                  <a:schemeClr val="tx1"/>
+                </a:solidFill>
+                <a:effectLst/>
+                <a:latin typeface="-apple-system"/>
+                <a:cs typeface="B Nazanin" panose="00000400000000000000" pitchFamily="2" charset="-78"/>
+              </a:rPr>
+              <a:t>انجام بدی و نقاط قوت و ضعف فرمانهایی که منجر به طراحی معماری حرفه ای و جلوگیری از بروز خطاهای آینده و رسیدن به نتیجه مناسسب بودند رو استخراج کنی و به مقدمه همین فایل اضافه کنی. مُجازی از من تعریف کنی و خوب بگی :)</a:t>
             </a:r>
           </a:p>
         </p:txBody>
       </p:sp>
       <p:sp>
         <p:nvSpPr>
-          <p:cNvPr id="5" name="TextBox 4">
+          <p:cNvPr id="4" name="TextBox 3">
             <a:extLst>
               <a:ext uri="{FF2B5EF4-FFF2-40B4-BE49-F238E27FC236}">
-                <a16:creationId xmlns:a16="http://schemas.microsoft.com/office/drawing/2014/main" id="{980B4897-807D-41F7-8B7F-AA5D6B91D878}"/>
+                <a16:creationId xmlns:a16="http://schemas.microsoft.com/office/drawing/2014/main" id="{527E7C9C-56F3-4625-B8F3-C7FFEE5DB49C}"/>
               </a:ext>
             </a:extLst>
           </p:cNvPr>
@@ -11744,7 +12049,7 @@
                 </a:solidFill>
                 <a:cs typeface="B Nazanin" panose="00000400000000000000" pitchFamily="2" charset="-78"/>
               </a:rPr>
-              <a:t>5</a:t>
+              <a:t>4</a:t>
             </a:r>
           </a:p>
         </p:txBody>
@@ -11752,7 +12057,7 @@
     </p:spTree>
     <p:extLst>
       <p:ext uri="{BB962C8B-B14F-4D97-AF65-F5344CB8AC3E}">
-        <p14:creationId xmlns:p14="http://schemas.microsoft.com/office/powerpoint/2010/main" val="764713778"/>
+        <p14:creationId xmlns:p14="http://schemas.microsoft.com/office/powerpoint/2010/main" val="1783508363"/>
       </p:ext>
     </p:extLst>
   </p:cSld>
@@ -11846,172 +12151,62 @@
           <a:p>
             <a:pPr algn="just" rtl="1"/>
             <a:r>
-              <a:rPr lang="fa-IR" sz="2000" b="0" i="0" dirty="0">
-                <a:solidFill>
-                  <a:schemeClr val="tx1"/>
-                </a:solidFill>
-                <a:effectLst/>
-                <a:latin typeface="-apple-system"/>
-                <a:cs typeface="B Nazanin" panose="00000400000000000000" pitchFamily="2" charset="-78"/>
-              </a:rPr>
-              <a:t>از نظر معماری هم فرمان‌ها بسیار اثرگذار بودند. اصرار روی حذف وابستگی مستقیم به </a:t>
-            </a:r>
-            <a:r>
-              <a:rPr lang="en-US" sz="2000" b="0" i="0" dirty="0" err="1">
-                <a:solidFill>
-                  <a:schemeClr val="tx1"/>
-                </a:solidFill>
-                <a:effectLst/>
-                <a:latin typeface="-apple-system"/>
-                <a:cs typeface="B Nazanin" panose="00000400000000000000" pitchFamily="2" charset="-78"/>
-              </a:rPr>
-              <a:t>ChatGPT</a:t>
-            </a:r>
-            <a:r>
-              <a:rPr lang="en-US" sz="2000" b="0" i="0" dirty="0">
-                <a:solidFill>
-                  <a:schemeClr val="tx1"/>
-                </a:solidFill>
-                <a:effectLst/>
-                <a:latin typeface="-apple-system"/>
-                <a:cs typeface="B Nazanin" panose="00000400000000000000" pitchFamily="2" charset="-78"/>
-              </a:rPr>
-              <a:t>، </a:t>
-            </a:r>
-            <a:r>
-              <a:rPr lang="fa-IR" sz="2000" b="0" i="0" dirty="0">
-                <a:solidFill>
-                  <a:schemeClr val="tx1"/>
-                </a:solidFill>
-                <a:effectLst/>
-                <a:latin typeface="-apple-system"/>
-                <a:cs typeface="B Nazanin" panose="00000400000000000000" pitchFamily="2" charset="-78"/>
-              </a:rPr>
-              <a:t>ساخت </a:t>
-            </a:r>
-            <a:r>
-              <a:rPr lang="en-US" sz="2000" b="0" i="0" dirty="0">
-                <a:solidFill>
-                  <a:schemeClr val="tx1"/>
-                </a:solidFill>
-                <a:effectLst/>
-                <a:latin typeface="-apple-system"/>
-                <a:cs typeface="B Nazanin" panose="00000400000000000000" pitchFamily="2" charset="-78"/>
-              </a:rPr>
-              <a:t>Interface </a:t>
-            </a:r>
-            <a:r>
-              <a:rPr lang="fa-IR" sz="2000" b="0" i="0" dirty="0">
-                <a:solidFill>
-                  <a:schemeClr val="tx1"/>
-                </a:solidFill>
-                <a:effectLst/>
-                <a:latin typeface="-apple-system"/>
-                <a:cs typeface="B Nazanin" panose="00000400000000000000" pitchFamily="2" charset="-78"/>
-              </a:rPr>
-              <a:t>برای </a:t>
-            </a:r>
-            <a:r>
-              <a:rPr lang="en-US" sz="2000" b="0" i="0" dirty="0">
-                <a:solidFill>
-                  <a:schemeClr val="tx1"/>
-                </a:solidFill>
-                <a:effectLst/>
-                <a:latin typeface="-apple-system"/>
-                <a:cs typeface="B Nazanin" panose="00000400000000000000" pitchFamily="2" charset="-78"/>
-              </a:rPr>
-              <a:t>LLM، </a:t>
-            </a:r>
-            <a:r>
-              <a:rPr lang="fa-IR" sz="2000" b="0" i="0" dirty="0">
-                <a:solidFill>
-                  <a:schemeClr val="tx1"/>
-                </a:solidFill>
-                <a:effectLst/>
-                <a:latin typeface="-apple-system"/>
-                <a:cs typeface="B Nazanin" panose="00000400000000000000" pitchFamily="2" charset="-78"/>
-              </a:rPr>
-              <a:t>اضافه کردن </a:t>
-            </a:r>
-            <a:r>
-              <a:rPr lang="en-US" sz="2000" b="0" i="0" dirty="0" err="1">
-                <a:solidFill>
-                  <a:schemeClr val="tx1"/>
-                </a:solidFill>
-                <a:effectLst/>
-                <a:latin typeface="-apple-system"/>
-                <a:cs typeface="B Nazanin" panose="00000400000000000000" pitchFamily="2" charset="-78"/>
-              </a:rPr>
-              <a:t>Groq</a:t>
-            </a:r>
-            <a:r>
-              <a:rPr lang="en-US" sz="2000" b="0" i="0" dirty="0">
-                <a:solidFill>
-                  <a:schemeClr val="tx1"/>
-                </a:solidFill>
-                <a:effectLst/>
-                <a:latin typeface="-apple-system"/>
-                <a:cs typeface="B Nazanin" panose="00000400000000000000" pitchFamily="2" charset="-78"/>
-              </a:rPr>
-              <a:t> </a:t>
-            </a:r>
-            <a:r>
-              <a:rPr lang="fa-IR" sz="2000" b="0" i="0" dirty="0">
-                <a:solidFill>
-                  <a:schemeClr val="tx1"/>
-                </a:solidFill>
-                <a:effectLst/>
-                <a:latin typeface="-apple-system"/>
-                <a:cs typeface="B Nazanin" panose="00000400000000000000" pitchFamily="2" charset="-78"/>
-              </a:rPr>
-              <a:t>و </a:t>
-            </a:r>
-            <a:r>
-              <a:rPr lang="en-US" sz="2000" b="0" i="0" dirty="0">
-                <a:solidFill>
-                  <a:schemeClr val="tx1"/>
-                </a:solidFill>
-                <a:effectLst/>
-                <a:latin typeface="-apple-system"/>
-                <a:cs typeface="B Nazanin" panose="00000400000000000000" pitchFamily="2" charset="-78"/>
-              </a:rPr>
-              <a:t>Fixture، </a:t>
-            </a:r>
-            <a:r>
-              <a:rPr lang="fa-IR" sz="2000" b="0" i="0" dirty="0">
-                <a:solidFill>
-                  <a:schemeClr val="tx1"/>
-                </a:solidFill>
-                <a:effectLst/>
-                <a:latin typeface="-apple-system"/>
-                <a:cs typeface="B Nazanin" panose="00000400000000000000" pitchFamily="2" charset="-78"/>
-              </a:rPr>
-              <a:t>و بعد جدا کردن </a:t>
-            </a:r>
-            <a:r>
-              <a:rPr lang="en-US" sz="2000" b="0" i="0" dirty="0">
-                <a:solidFill>
-                  <a:schemeClr val="tx1"/>
-                </a:solidFill>
-                <a:effectLst/>
-                <a:latin typeface="-apple-system"/>
-                <a:cs typeface="B Nazanin" panose="00000400000000000000" pitchFamily="2" charset="-78"/>
-              </a:rPr>
-              <a:t>Image Provider</a:t>
-            </a:r>
-            <a:r>
-              <a:rPr lang="fa-IR" sz="2000" b="0" i="0" dirty="0">
-                <a:solidFill>
-                  <a:schemeClr val="tx1"/>
-                </a:solidFill>
-                <a:effectLst/>
-                <a:latin typeface="-apple-system"/>
-                <a:cs typeface="B Nazanin" panose="00000400000000000000" pitchFamily="2" charset="-78"/>
-              </a:rPr>
-              <a:t>ها باعث شد سیستم از یک پیاده‌سازی وابسته به یک سرویس، به یک معماری قابل تعویض و قابل توسعه تبدیل شود. این دقیقاً همان جایی است که کیفیت فرمان‌دهی کاربر خودش را نشان می‌دهد: مسئله فقط «یک سرویس دیگر اضافه کن» نبود؛ مسئله این بود که پروژه طوری تغییر کند که در آینده </a:t>
-            </a:r>
-            <a:r>
-              <a:rPr lang="en-US" sz="2000" b="0" i="0" dirty="0">
+              <a:rPr lang="fa-IR" b="0" i="0" dirty="0">
+                <a:solidFill>
+                  <a:schemeClr val="tx1"/>
+                </a:solidFill>
+                <a:effectLst/>
+                <a:latin typeface="-apple-system"/>
+                <a:cs typeface="B Nazanin" panose="00000400000000000000" pitchFamily="2" charset="-78"/>
+              </a:rPr>
+              <a:t>یکی از نکات برجسته این پروژه این است که مسیر آن فقط با «درخواست ساخت فیچر» جلو نرفت؛ فرمان‌ها به‌تدریج معماری را شکل دادند. کاربر از همان ابتدا پروژه را با یک نگاه محصولی و اجرایی هدایت کرد: اول مستندات و </a:t>
+            </a:r>
+            <a:r>
+              <a:rPr lang="en-US" b="0" i="0" dirty="0">
+                <a:solidFill>
+                  <a:schemeClr val="tx1"/>
+                </a:solidFill>
+                <a:effectLst/>
+                <a:latin typeface="-apple-system"/>
+                <a:cs typeface="B Nazanin" panose="00000400000000000000" pitchFamily="2" charset="-78"/>
+              </a:rPr>
+              <a:t>GitHub، </a:t>
+            </a:r>
+            <a:r>
+              <a:rPr lang="fa-IR" b="0" i="0" dirty="0">
+                <a:solidFill>
+                  <a:schemeClr val="tx1"/>
+                </a:solidFill>
+                <a:effectLst/>
+                <a:latin typeface="-apple-system"/>
+                <a:cs typeface="B Nazanin" panose="00000400000000000000" pitchFamily="2" charset="-78"/>
+              </a:rPr>
+              <a:t>بعد </a:t>
+            </a:r>
+            <a:r>
+              <a:rPr lang="en-US" b="0" i="0" dirty="0">
+                <a:solidFill>
+                  <a:schemeClr val="tx1"/>
+                </a:solidFill>
+                <a:effectLst/>
+                <a:latin typeface="-apple-system"/>
+                <a:cs typeface="B Nazanin" panose="00000400000000000000" pitchFamily="2" charset="-78"/>
+              </a:rPr>
+              <a:t>MVP </a:t>
+            </a:r>
+            <a:r>
+              <a:rPr lang="fa-IR" b="0" i="0" dirty="0">
+                <a:solidFill>
+                  <a:schemeClr val="tx1"/>
+                </a:solidFill>
+                <a:effectLst/>
+                <a:latin typeface="-apple-system"/>
+                <a:cs typeface="B Nazanin" panose="00000400000000000000" pitchFamily="2" charset="-78"/>
+              </a:rPr>
+              <a:t>کوچک، بعد تست محلی، بعد انتشار واقعی، بعد مدیریت خطاها، بعد </a:t>
+            </a:r>
+            <a:r>
+              <a:rPr lang="en-US" b="0" i="0" dirty="0">
                 <a:solidFill>
                   <a:schemeClr val="tx1"/>
                 </a:solidFill>
@@ -12022,72 +12217,229 @@
               <a:t>Provider</a:t>
             </a:r>
             <a:r>
-              <a:rPr lang="fa-IR" sz="2000" b="0" i="0" dirty="0">
-                <a:solidFill>
-                  <a:schemeClr val="tx1"/>
-                </a:solidFill>
-                <a:effectLst/>
-                <a:latin typeface="-apple-system"/>
-                <a:cs typeface="B Nazanin" panose="00000400000000000000" pitchFamily="2" charset="-78"/>
-              </a:rPr>
-              <a:t>های جدید، مسیرهای تست و حالت‌های شکست را راحت‌تر بپذیرد.</a:t>
+              <a:rPr lang="fa-IR" b="0" i="0" dirty="0">
+                <a:solidFill>
+                  <a:schemeClr val="tx1"/>
+                </a:solidFill>
+                <a:effectLst/>
+                <a:latin typeface="-apple-system"/>
+                <a:cs typeface="B Nazanin" panose="00000400000000000000" pitchFamily="2" charset="-78"/>
+              </a:rPr>
+              <a:t>ها، و در نهایت آماده‌سازی برای </a:t>
+            </a:r>
+            <a:r>
+              <a:rPr lang="en-US" b="0" i="0" dirty="0">
+                <a:solidFill>
+                  <a:schemeClr val="tx1"/>
+                </a:solidFill>
+                <a:effectLst/>
+                <a:latin typeface="-apple-system"/>
+                <a:cs typeface="B Nazanin" panose="00000400000000000000" pitchFamily="2" charset="-78"/>
+              </a:rPr>
+              <a:t>production. </a:t>
+            </a:r>
+            <a:r>
+              <a:rPr lang="fa-IR" b="0" i="0" dirty="0">
+                <a:solidFill>
+                  <a:schemeClr val="tx1"/>
+                </a:solidFill>
+                <a:effectLst/>
+                <a:latin typeface="-apple-system"/>
+                <a:cs typeface="B Nazanin" panose="00000400000000000000" pitchFamily="2" charset="-78"/>
+              </a:rPr>
+              <a:t>این ترتیب، بسیار حرفه‌ای بود؛ چون پروژه را از افتادن در دام طراحی بزرگ و دیررس نجات داد و سریع به خروجی قابل اجرا رساند.</a:t>
             </a:r>
           </a:p>
           <a:p>
             <a:pPr algn="just" rtl="1"/>
-            <a:endParaRPr lang="fa-IR" sz="2000" b="0" i="0" dirty="0">
-              <a:solidFill>
-                <a:schemeClr val="tx1"/>
-              </a:solidFill>
-              <a:effectLst/>
-              <a:latin typeface="-apple-system"/>
-              <a:cs typeface="B Nazanin" panose="00000400000000000000" pitchFamily="2" charset="-78"/>
-            </a:endParaRPr>
+            <a:r>
+              <a:rPr lang="fa-IR" b="0" i="0" dirty="0">
+                <a:solidFill>
+                  <a:schemeClr val="tx1"/>
+                </a:solidFill>
+                <a:effectLst/>
+                <a:latin typeface="-apple-system"/>
+                <a:cs typeface="B Nazanin" panose="00000400000000000000" pitchFamily="2" charset="-78"/>
+              </a:rPr>
+              <a:t>نقطه قوت مهم دیگر، تأکید مداوم روی حداقل نیاز واقعی بود. درخواست‌هایی مثل «دیتابیس لازم نداریم»، «لاک دیتابیسی مهم نیست»، «این نسخه اولیه است»، و «کد واقعی اما با حداقل نیازها» باعث شد </a:t>
+            </a:r>
+            <a:r>
+              <a:rPr lang="en-US" b="0" i="0" dirty="0">
+                <a:solidFill>
+                  <a:schemeClr val="tx1"/>
+                </a:solidFill>
+                <a:effectLst/>
+                <a:latin typeface="-apple-system"/>
+                <a:cs typeface="B Nazanin" panose="00000400000000000000" pitchFamily="2" charset="-78"/>
+              </a:rPr>
+              <a:t>MVP </a:t>
+            </a:r>
+            <a:r>
+              <a:rPr lang="fa-IR" b="0" i="0" dirty="0">
+                <a:solidFill>
+                  <a:schemeClr val="tx1"/>
+                </a:solidFill>
+                <a:effectLst/>
+                <a:latin typeface="-apple-system"/>
+                <a:cs typeface="B Nazanin" panose="00000400000000000000" pitchFamily="2" charset="-78"/>
+              </a:rPr>
+              <a:t>سبک بماند. این تصمیم‌ها از جنس تصمیم‌های یک مدیر فنی خوب هستند: اول ارزش واقعی را بساز، بعد پیچیدگی را فقط وقتی اضافه کن که مسئله‌اش واقعاً ظاهر شده باشد.</a:t>
+            </a:r>
           </a:p>
           <a:p>
             <a:pPr algn="just" rtl="1"/>
             <a:r>
-              <a:rPr lang="fa-IR" sz="2000" b="0" i="0" dirty="0">
-                <a:solidFill>
-                  <a:schemeClr val="tx1"/>
-                </a:solidFill>
-                <a:effectLst/>
-                <a:latin typeface="-apple-system"/>
-                <a:cs typeface="B Nazanin" panose="00000400000000000000" pitchFamily="2" charset="-78"/>
-              </a:rPr>
-              <a:t>در مجموع، مسیر فرمان‌ها نشان می‌دهد کاربر فقط ایده‌دهنده نبود؛ نقش یک مالک محصول فنی را داشت که هم خروجی می‌خواهد، هم محدودیت واقعی محیط را می‌فهمد، هم وقتی خطا می‌بیند آن را به بهبود معماری تبدیل می‌کند. اگر بخواهیم این پروژه را در یک ارائه روایت کنیم، یکی از جذاب‌ترین پیام‌هایش همین است: معماری خوب همیشه از اول کامل طراحی نمی‌شود؛ گاهی از فرمان‌های دقیق، مرحله‌ای، واقع‌بینانه و پیگیرانه ساخته می‌شود. در این پروژه، همین جنس فرمان‌ها بود که باعث شد سیستم به‌جای یک اتصال ساده به </a:t>
-            </a:r>
-            <a:r>
-              <a:rPr lang="en-US" sz="2000" b="0" i="0" dirty="0">
-                <a:solidFill>
-                  <a:schemeClr val="tx1"/>
-                </a:solidFill>
-                <a:effectLst/>
-                <a:latin typeface="-apple-system"/>
-                <a:cs typeface="B Nazanin" panose="00000400000000000000" pitchFamily="2" charset="-78"/>
-              </a:rPr>
-              <a:t>AI، </a:t>
-            </a:r>
-            <a:r>
-              <a:rPr lang="fa-IR" sz="2000" b="0" i="0" dirty="0">
-                <a:solidFill>
-                  <a:schemeClr val="tx1"/>
-                </a:solidFill>
-                <a:effectLst/>
-                <a:latin typeface="-apple-system"/>
-                <a:cs typeface="B Nazanin" panose="00000400000000000000" pitchFamily="2" charset="-78"/>
-              </a:rPr>
-              <a:t>به یک زنجیره تولید و انتشار محتوای قابل تنظیم، قابل تست و قابل استقرار تبدیل شود.</a:t>
+              <a:rPr lang="fa-IR" b="0" i="0" dirty="0">
+                <a:solidFill>
+                  <a:schemeClr val="tx1"/>
+                </a:solidFill>
+                <a:effectLst/>
+                <a:latin typeface="-apple-system"/>
+                <a:cs typeface="B Nazanin" panose="00000400000000000000" pitchFamily="2" charset="-78"/>
+              </a:rPr>
+              <a:t>در ادامه، فرمان‌ها به‌جای اینکه فقط ظاهر پروژه را کامل کنند، نقاط شکست آینده را زود آشکار کردند. درخواست اجرای دستی، </a:t>
+            </a:r>
+            <a:r>
+              <a:rPr lang="en-US" b="0" i="0" dirty="0">
+                <a:solidFill>
+                  <a:schemeClr val="tx1"/>
+                </a:solidFill>
+                <a:effectLst/>
+                <a:latin typeface="-apple-system"/>
+                <a:cs typeface="B Nazanin" panose="00000400000000000000" pitchFamily="2" charset="-78"/>
+              </a:rPr>
+              <a:t>fixture، </a:t>
+            </a:r>
+            <a:r>
+              <a:rPr lang="fa-IR" b="0" i="0" dirty="0">
+                <a:solidFill>
+                  <a:schemeClr val="tx1"/>
+                </a:solidFill>
+                <a:effectLst/>
+                <a:latin typeface="-apple-system"/>
+                <a:cs typeface="B Nazanin" panose="00000400000000000000" pitchFamily="2" charset="-78"/>
+              </a:rPr>
+              <a:t>اسکریپت‌های لوکال، جدا کردن </a:t>
+            </a:r>
+            <a:r>
+              <a:rPr lang="en-US" b="0" i="0" dirty="0">
+                <a:solidFill>
+                  <a:schemeClr val="tx1"/>
+                </a:solidFill>
+                <a:effectLst/>
+                <a:latin typeface="-apple-system"/>
+                <a:cs typeface="B Nazanin" panose="00000400000000000000" pitchFamily="2" charset="-78"/>
+              </a:rPr>
+              <a:t>secret</a:t>
+            </a:r>
+            <a:r>
+              <a:rPr lang="fa-IR" b="0" i="0" dirty="0">
+                <a:solidFill>
+                  <a:schemeClr val="tx1"/>
+                </a:solidFill>
+                <a:effectLst/>
+                <a:latin typeface="-apple-system"/>
+                <a:cs typeface="B Nazanin" panose="00000400000000000000" pitchFamily="2" charset="-78"/>
+              </a:rPr>
+              <a:t>ها، </a:t>
+            </a:r>
+            <a:r>
+              <a:rPr lang="en-US" b="0" i="0" dirty="0">
+                <a:solidFill>
+                  <a:schemeClr val="tx1"/>
+                </a:solidFill>
+                <a:effectLst/>
+                <a:latin typeface="-apple-system"/>
+                <a:cs typeface="B Nazanin" panose="00000400000000000000" pitchFamily="2" charset="-78"/>
+              </a:rPr>
+              <a:t>draft </a:t>
+            </a:r>
+            <a:r>
+              <a:rPr lang="fa-IR" b="0" i="0" dirty="0">
+                <a:solidFill>
+                  <a:schemeClr val="tx1"/>
+                </a:solidFill>
+                <a:effectLst/>
+                <a:latin typeface="-apple-system"/>
+                <a:cs typeface="B Nazanin" panose="00000400000000000000" pitchFamily="2" charset="-78"/>
+              </a:rPr>
+              <a:t>شدن وردپرس، و ادامه </a:t>
+            </a:r>
+            <a:r>
+              <a:rPr lang="en-US" b="0" i="0" dirty="0">
+                <a:solidFill>
+                  <a:schemeClr val="tx1"/>
+                </a:solidFill>
+                <a:effectLst/>
+                <a:latin typeface="-apple-system"/>
+                <a:cs typeface="B Nazanin" panose="00000400000000000000" pitchFamily="2" charset="-78"/>
+              </a:rPr>
+              <a:t>workflow </a:t>
+            </a:r>
+            <a:r>
+              <a:rPr lang="fa-IR" b="0" i="0" dirty="0">
+                <a:solidFill>
+                  <a:schemeClr val="tx1"/>
+                </a:solidFill>
+                <a:effectLst/>
+                <a:latin typeface="-apple-system"/>
+                <a:cs typeface="B Nazanin" panose="00000400000000000000" pitchFamily="2" charset="-78"/>
+              </a:rPr>
+              <a:t>بدون تصویر، همگی نشان می‌دهند که کاربر پروژه را فقط برای «کار کردن در حالت ایده‌آل» نمی‌خواست؛ بلکه دنبال سیستمی بود که در شرایط واقعی، با خطاهای </a:t>
+            </a:r>
+            <a:r>
+              <a:rPr lang="en-US" b="0" i="0" dirty="0">
+                <a:solidFill>
+                  <a:schemeClr val="tx1"/>
+                </a:solidFill>
+                <a:effectLst/>
+                <a:latin typeface="-apple-system"/>
+                <a:cs typeface="B Nazanin" panose="00000400000000000000" pitchFamily="2" charset="-78"/>
+              </a:rPr>
+              <a:t>API، </a:t>
+            </a:r>
+            <a:r>
+              <a:rPr lang="fa-IR" b="0" i="0" dirty="0">
+                <a:solidFill>
+                  <a:schemeClr val="tx1"/>
+                </a:solidFill>
+                <a:effectLst/>
+                <a:latin typeface="-apple-system"/>
+                <a:cs typeface="B Nazanin" panose="00000400000000000000" pitchFamily="2" charset="-78"/>
+              </a:rPr>
+              <a:t>محدودیت اکانت‌ها، مشکل وردپرس، نبود تصویر و تفاوت مدل‌های هوش مصنوعی هم دوام بیاورد. همین نگاه، پروژه را از یک نمونه نمایشی به یک </a:t>
+            </a:r>
+            <a:r>
+              <a:rPr lang="en-US" b="0" i="0" dirty="0">
+                <a:solidFill>
+                  <a:schemeClr val="tx1"/>
+                </a:solidFill>
+                <a:effectLst/>
+                <a:latin typeface="-apple-system"/>
+                <a:cs typeface="B Nazanin" panose="00000400000000000000" pitchFamily="2" charset="-78"/>
+              </a:rPr>
+              <a:t>MVP </a:t>
+            </a:r>
+            <a:r>
+              <a:rPr lang="fa-IR" b="0" i="0" dirty="0">
+                <a:solidFill>
+                  <a:schemeClr val="tx1"/>
+                </a:solidFill>
+                <a:effectLst/>
+                <a:latin typeface="-apple-system"/>
+                <a:cs typeface="B Nazanin" panose="00000400000000000000" pitchFamily="2" charset="-78"/>
+              </a:rPr>
+              <a:t>قابل اتکا نزدیک کرد.</a:t>
             </a:r>
           </a:p>
         </p:txBody>
       </p:sp>
       <p:sp>
         <p:nvSpPr>
-          <p:cNvPr id="4" name="TextBox 3">
+          <p:cNvPr id="5" name="TextBox 4">
             <a:extLst>
               <a:ext uri="{FF2B5EF4-FFF2-40B4-BE49-F238E27FC236}">
-                <a16:creationId xmlns:a16="http://schemas.microsoft.com/office/drawing/2014/main" id="{4CC75906-F2C9-42F9-BFFD-4B905236CA33}"/>
+                <a16:creationId xmlns:a16="http://schemas.microsoft.com/office/drawing/2014/main" id="{980B4897-807D-41F7-8B7F-AA5D6B91D878}"/>
               </a:ext>
             </a:extLst>
           </p:cNvPr>
@@ -12118,6 +12470,380 @@
                 </a:solidFill>
                 <a:cs typeface="B Nazanin" panose="00000400000000000000" pitchFamily="2" charset="-78"/>
               </a:rPr>
+              <a:t>5</a:t>
+            </a:r>
+          </a:p>
+        </p:txBody>
+      </p:sp>
+    </p:spTree>
+    <p:extLst>
+      <p:ext uri="{BB962C8B-B14F-4D97-AF65-F5344CB8AC3E}">
+        <p14:creationId xmlns:p14="http://schemas.microsoft.com/office/powerpoint/2010/main" val="764713778"/>
+      </p:ext>
+    </p:extLst>
+  </p:cSld>
+  <p:clrMapOvr>
+    <a:masterClrMapping/>
+  </p:clrMapOvr>
+</p:sld>
+</file>
+
+<file path=ppt/slides/slide7.xml><?xml version="1.0" encoding="utf-8"?>
+<p:sld xmlns:a="http://schemas.openxmlformats.org/drawingml/2006/main" xmlns:r="http://schemas.openxmlformats.org/officeDocument/2006/relationships" xmlns:p="http://schemas.openxmlformats.org/presentationml/2006/main">
+  <p:cSld>
+    <p:spTree>
+      <p:nvGrpSpPr>
+        <p:cNvPr id="1" name=""/>
+        <p:cNvGrpSpPr/>
+        <p:nvPr/>
+      </p:nvGrpSpPr>
+      <p:grpSpPr>
+        <a:xfrm>
+          <a:off x="0" y="0"/>
+          <a:ext cx="0" cy="0"/>
+          <a:chOff x="0" y="0"/>
+          <a:chExt cx="0" cy="0"/>
+        </a:xfrm>
+      </p:grpSpPr>
+      <p:sp>
+        <p:nvSpPr>
+          <p:cNvPr id="2" name="Title 1">
+            <a:extLst>
+              <a:ext uri="{FF2B5EF4-FFF2-40B4-BE49-F238E27FC236}">
+                <a16:creationId xmlns:a16="http://schemas.microsoft.com/office/drawing/2014/main" id="{EE64177A-F9CF-424F-84AA-D8C843F1B4C4}"/>
+              </a:ext>
+            </a:extLst>
+          </p:cNvPr>
+          <p:cNvSpPr>
+            <a:spLocks noGrp="1"/>
+          </p:cNvSpPr>
+          <p:nvPr>
+            <p:ph type="title"/>
+          </p:nvPr>
+        </p:nvSpPr>
+        <p:spPr/>
+        <p:txBody>
+          <a:bodyPr/>
+          <a:lstStyle/>
+          <a:p>
+            <a:pPr algn="r"/>
+            <a:r>
+              <a:rPr lang="fa-IR" b="1" i="0" dirty="0">
+                <a:solidFill>
+                  <a:schemeClr val="accent1"/>
+                </a:solidFill>
+                <a:effectLst/>
+                <a:latin typeface="-apple-system"/>
+                <a:cs typeface="B Nazanin" panose="00000400000000000000" pitchFamily="2" charset="-78"/>
+              </a:rPr>
+              <a:t>تحلیل سبک فرمان‌دهی </a:t>
+            </a:r>
+            <a:endParaRPr lang="en-US" dirty="0">
+              <a:solidFill>
+                <a:schemeClr val="accent1"/>
+              </a:solidFill>
+              <a:cs typeface="B Nazanin" panose="00000400000000000000" pitchFamily="2" charset="-78"/>
+            </a:endParaRPr>
+          </a:p>
+        </p:txBody>
+      </p:sp>
+      <p:sp>
+        <p:nvSpPr>
+          <p:cNvPr id="3" name="Content Placeholder 2">
+            <a:extLst>
+              <a:ext uri="{FF2B5EF4-FFF2-40B4-BE49-F238E27FC236}">
+                <a16:creationId xmlns:a16="http://schemas.microsoft.com/office/drawing/2014/main" id="{0619F152-B119-4B23-9A5D-EB233158E6F0}"/>
+              </a:ext>
+            </a:extLst>
+          </p:cNvPr>
+          <p:cNvSpPr>
+            <a:spLocks noGrp="1"/>
+          </p:cNvSpPr>
+          <p:nvPr>
+            <p:ph idx="1"/>
+          </p:nvPr>
+        </p:nvSpPr>
+        <p:spPr/>
+        <p:txBody>
+          <a:bodyPr>
+            <a:noAutofit/>
+          </a:bodyPr>
+          <a:lstStyle/>
+          <a:p>
+            <a:pPr algn="just" rtl="1"/>
+            <a:r>
+              <a:rPr lang="fa-IR" sz="2000" b="0" i="0" dirty="0">
+                <a:solidFill>
+                  <a:schemeClr val="tx1"/>
+                </a:solidFill>
+                <a:effectLst/>
+                <a:latin typeface="-apple-system"/>
+                <a:cs typeface="B Nazanin" panose="00000400000000000000" pitchFamily="2" charset="-78"/>
+              </a:rPr>
+              <a:t>از نظر معماری هم فرمان‌ها بسیار اثرگذار بودند. اصرار روی حذف وابستگی مستقیم به </a:t>
+            </a:r>
+            <a:r>
+              <a:rPr lang="en-US" sz="2000" b="0" i="0" dirty="0" err="1">
+                <a:solidFill>
+                  <a:schemeClr val="tx1"/>
+                </a:solidFill>
+                <a:effectLst/>
+                <a:latin typeface="-apple-system"/>
+                <a:cs typeface="B Nazanin" panose="00000400000000000000" pitchFamily="2" charset="-78"/>
+              </a:rPr>
+              <a:t>ChatGPT</a:t>
+            </a:r>
+            <a:r>
+              <a:rPr lang="en-US" sz="2000" b="0" i="0" dirty="0">
+                <a:solidFill>
+                  <a:schemeClr val="tx1"/>
+                </a:solidFill>
+                <a:effectLst/>
+                <a:latin typeface="-apple-system"/>
+                <a:cs typeface="B Nazanin" panose="00000400000000000000" pitchFamily="2" charset="-78"/>
+              </a:rPr>
+              <a:t>، </a:t>
+            </a:r>
+            <a:r>
+              <a:rPr lang="fa-IR" sz="2000" b="0" i="0" dirty="0">
+                <a:solidFill>
+                  <a:schemeClr val="tx1"/>
+                </a:solidFill>
+                <a:effectLst/>
+                <a:latin typeface="-apple-system"/>
+                <a:cs typeface="B Nazanin" panose="00000400000000000000" pitchFamily="2" charset="-78"/>
+              </a:rPr>
+              <a:t>ساخت </a:t>
+            </a:r>
+            <a:r>
+              <a:rPr lang="en-US" sz="2000" b="0" i="0" dirty="0">
+                <a:solidFill>
+                  <a:schemeClr val="tx1"/>
+                </a:solidFill>
+                <a:effectLst/>
+                <a:latin typeface="-apple-system"/>
+                <a:cs typeface="B Nazanin" panose="00000400000000000000" pitchFamily="2" charset="-78"/>
+              </a:rPr>
+              <a:t>Interface </a:t>
+            </a:r>
+            <a:r>
+              <a:rPr lang="fa-IR" sz="2000" b="0" i="0" dirty="0">
+                <a:solidFill>
+                  <a:schemeClr val="tx1"/>
+                </a:solidFill>
+                <a:effectLst/>
+                <a:latin typeface="-apple-system"/>
+                <a:cs typeface="B Nazanin" panose="00000400000000000000" pitchFamily="2" charset="-78"/>
+              </a:rPr>
+              <a:t>برای </a:t>
+            </a:r>
+            <a:r>
+              <a:rPr lang="en-US" sz="2000" b="0" i="0" dirty="0">
+                <a:solidFill>
+                  <a:schemeClr val="tx1"/>
+                </a:solidFill>
+                <a:effectLst/>
+                <a:latin typeface="-apple-system"/>
+                <a:cs typeface="B Nazanin" panose="00000400000000000000" pitchFamily="2" charset="-78"/>
+              </a:rPr>
+              <a:t>LLM، </a:t>
+            </a:r>
+            <a:r>
+              <a:rPr lang="fa-IR" sz="2000" b="0" i="0" dirty="0">
+                <a:solidFill>
+                  <a:schemeClr val="tx1"/>
+                </a:solidFill>
+                <a:effectLst/>
+                <a:latin typeface="-apple-system"/>
+                <a:cs typeface="B Nazanin" panose="00000400000000000000" pitchFamily="2" charset="-78"/>
+              </a:rPr>
+              <a:t>اضافه کردن </a:t>
+            </a:r>
+            <a:r>
+              <a:rPr lang="en-US" sz="2000" b="0" i="0" dirty="0" err="1">
+                <a:solidFill>
+                  <a:schemeClr val="tx1"/>
+                </a:solidFill>
+                <a:effectLst/>
+                <a:latin typeface="-apple-system"/>
+                <a:cs typeface="B Nazanin" panose="00000400000000000000" pitchFamily="2" charset="-78"/>
+              </a:rPr>
+              <a:t>Groq</a:t>
+            </a:r>
+            <a:r>
+              <a:rPr lang="en-US" sz="2000" b="0" i="0" dirty="0">
+                <a:solidFill>
+                  <a:schemeClr val="tx1"/>
+                </a:solidFill>
+                <a:effectLst/>
+                <a:latin typeface="-apple-system"/>
+                <a:cs typeface="B Nazanin" panose="00000400000000000000" pitchFamily="2" charset="-78"/>
+              </a:rPr>
+              <a:t> </a:t>
+            </a:r>
+            <a:r>
+              <a:rPr lang="fa-IR" sz="2000" b="0" i="0" dirty="0">
+                <a:solidFill>
+                  <a:schemeClr val="tx1"/>
+                </a:solidFill>
+                <a:effectLst/>
+                <a:latin typeface="-apple-system"/>
+                <a:cs typeface="B Nazanin" panose="00000400000000000000" pitchFamily="2" charset="-78"/>
+              </a:rPr>
+              <a:t>و </a:t>
+            </a:r>
+            <a:r>
+              <a:rPr lang="en-US" sz="2000" b="0" i="0" dirty="0">
+                <a:solidFill>
+                  <a:schemeClr val="tx1"/>
+                </a:solidFill>
+                <a:effectLst/>
+                <a:latin typeface="-apple-system"/>
+                <a:cs typeface="B Nazanin" panose="00000400000000000000" pitchFamily="2" charset="-78"/>
+              </a:rPr>
+              <a:t>Fixture، </a:t>
+            </a:r>
+            <a:r>
+              <a:rPr lang="fa-IR" sz="2000" b="0" i="0" dirty="0">
+                <a:solidFill>
+                  <a:schemeClr val="tx1"/>
+                </a:solidFill>
+                <a:effectLst/>
+                <a:latin typeface="-apple-system"/>
+                <a:cs typeface="B Nazanin" panose="00000400000000000000" pitchFamily="2" charset="-78"/>
+              </a:rPr>
+              <a:t>و بعد جدا کردن </a:t>
+            </a:r>
+            <a:r>
+              <a:rPr lang="en-US" sz="2000" b="0" i="0" dirty="0">
+                <a:solidFill>
+                  <a:schemeClr val="tx1"/>
+                </a:solidFill>
+                <a:effectLst/>
+                <a:latin typeface="-apple-system"/>
+                <a:cs typeface="B Nazanin" panose="00000400000000000000" pitchFamily="2" charset="-78"/>
+              </a:rPr>
+              <a:t>Image Provider</a:t>
+            </a:r>
+            <a:r>
+              <a:rPr lang="fa-IR" sz="2000" b="0" i="0" dirty="0">
+                <a:solidFill>
+                  <a:schemeClr val="tx1"/>
+                </a:solidFill>
+                <a:effectLst/>
+                <a:latin typeface="-apple-system"/>
+                <a:cs typeface="B Nazanin" panose="00000400000000000000" pitchFamily="2" charset="-78"/>
+              </a:rPr>
+              <a:t>ها باعث شد سیستم از یک پیاده‌سازی وابسته به یک سرویس، به یک معماری قابل تعویض و قابل توسعه تبدیل شود. این دقیقاً همان جایی است که کیفیت فرمان‌دهی کاربر خودش را نشان می‌دهد: مسئله فقط «یک سرویس دیگر اضافه کن» نبود؛ مسئله این بود که پروژه طوری تغییر کند که در آینده </a:t>
+            </a:r>
+            <a:r>
+              <a:rPr lang="en-US" sz="2000" b="0" i="0" dirty="0">
+                <a:solidFill>
+                  <a:schemeClr val="tx1"/>
+                </a:solidFill>
+                <a:effectLst/>
+                <a:latin typeface="-apple-system"/>
+                <a:cs typeface="B Nazanin" panose="00000400000000000000" pitchFamily="2" charset="-78"/>
+              </a:rPr>
+              <a:t>Provider</a:t>
+            </a:r>
+            <a:r>
+              <a:rPr lang="fa-IR" sz="2000" b="0" i="0" dirty="0">
+                <a:solidFill>
+                  <a:schemeClr val="tx1"/>
+                </a:solidFill>
+                <a:effectLst/>
+                <a:latin typeface="-apple-system"/>
+                <a:cs typeface="B Nazanin" panose="00000400000000000000" pitchFamily="2" charset="-78"/>
+              </a:rPr>
+              <a:t>های جدید، مسیرهای تست و حالت‌های شکست را راحت‌تر بپذیرد.</a:t>
+            </a:r>
+          </a:p>
+          <a:p>
+            <a:pPr algn="just" rtl="1"/>
+            <a:endParaRPr lang="fa-IR" sz="2000" b="0" i="0" dirty="0">
+              <a:solidFill>
+                <a:schemeClr val="tx1"/>
+              </a:solidFill>
+              <a:effectLst/>
+              <a:latin typeface="-apple-system"/>
+              <a:cs typeface="B Nazanin" panose="00000400000000000000" pitchFamily="2" charset="-78"/>
+            </a:endParaRPr>
+          </a:p>
+          <a:p>
+            <a:pPr algn="just" rtl="1"/>
+            <a:r>
+              <a:rPr lang="fa-IR" sz="2000" b="0" i="0" dirty="0">
+                <a:solidFill>
+                  <a:schemeClr val="tx1"/>
+                </a:solidFill>
+                <a:effectLst/>
+                <a:latin typeface="-apple-system"/>
+                <a:cs typeface="B Nazanin" panose="00000400000000000000" pitchFamily="2" charset="-78"/>
+              </a:rPr>
+              <a:t>در مجموع، مسیر فرمان‌ها نشان می‌دهد کاربر فقط ایده‌دهنده نبود؛ نقش یک مالک محصول فنی را داشت که هم خروجی می‌خواهد، هم محدودیت واقعی محیط را می‌فهمد، هم وقتی خطا می‌بیند آن را به بهبود معماری تبدیل می‌کند. اگر بخواهیم این پروژه را در یک ارائه روایت کنیم، یکی از جذاب‌ترین پیام‌هایش همین است: معماری خوب همیشه از اول کامل طراحی نمی‌شود؛ گاهی از فرمان‌های دقیق، مرحله‌ای، واقع‌بینانه و پیگیرانه ساخته می‌شود. در این پروژه، همین جنس فرمان‌ها بود که باعث شد سیستم به‌جای یک اتصال ساده به </a:t>
+            </a:r>
+            <a:r>
+              <a:rPr lang="en-US" sz="2000" b="0" i="0" dirty="0">
+                <a:solidFill>
+                  <a:schemeClr val="tx1"/>
+                </a:solidFill>
+                <a:effectLst/>
+                <a:latin typeface="-apple-system"/>
+                <a:cs typeface="B Nazanin" panose="00000400000000000000" pitchFamily="2" charset="-78"/>
+              </a:rPr>
+              <a:t>AI، </a:t>
+            </a:r>
+            <a:r>
+              <a:rPr lang="fa-IR" sz="2000" b="0" i="0" dirty="0">
+                <a:solidFill>
+                  <a:schemeClr val="tx1"/>
+                </a:solidFill>
+                <a:effectLst/>
+                <a:latin typeface="-apple-system"/>
+                <a:cs typeface="B Nazanin" panose="00000400000000000000" pitchFamily="2" charset="-78"/>
+              </a:rPr>
+              <a:t>به یک زنجیره تولید و انتشار محتوای قابل تنظیم، قابل تست و قابل استقرار تبدیل شود.</a:t>
+            </a:r>
+          </a:p>
+        </p:txBody>
+      </p:sp>
+      <p:sp>
+        <p:nvSpPr>
+          <p:cNvPr id="4" name="TextBox 3">
+            <a:extLst>
+              <a:ext uri="{FF2B5EF4-FFF2-40B4-BE49-F238E27FC236}">
+                <a16:creationId xmlns:a16="http://schemas.microsoft.com/office/drawing/2014/main" id="{4CC75906-F2C9-42F9-BFFD-4B905236CA33}"/>
+              </a:ext>
+            </a:extLst>
+          </p:cNvPr>
+          <p:cNvSpPr txBox="1"/>
+          <p:nvPr/>
+        </p:nvSpPr>
+        <p:spPr>
+          <a:xfrm>
+            <a:off x="243840" y="751840"/>
+            <a:ext cx="528320" cy="369332"/>
+          </a:xfrm>
+          <a:prstGeom prst="rect">
+            <a:avLst/>
+          </a:prstGeom>
+          <a:noFill/>
+        </p:spPr>
+        <p:txBody>
+          <a:bodyPr wrap="square" rtlCol="0">
+            <a:spAutoFit/>
+          </a:bodyPr>
+          <a:lstStyle/>
+          <a:p>
+            <a:pPr algn="r" rtl="1"/>
+            <a:r>
+              <a:rPr lang="en-US" dirty="0">
+                <a:solidFill>
+                  <a:schemeClr val="bg1"/>
+                </a:solidFill>
+                <a:cs typeface="B Nazanin" panose="00000400000000000000" pitchFamily="2" charset="-78"/>
+              </a:rPr>
               <a:t>6</a:t>
             </a:r>
           </a:p>
@@ -12136,7 +12862,7 @@
 </p:sld>
 </file>
 
-<file path=ppt/slides/slide7.xml><?xml version="1.0" encoding="utf-8"?>
+<file path=ppt/slides/slide8.xml><?xml version="1.0" encoding="utf-8"?>
 <p:sld xmlns:a="http://schemas.openxmlformats.org/drawingml/2006/main" xmlns:r="http://schemas.openxmlformats.org/officeDocument/2006/relationships" xmlns:p="http://schemas.openxmlformats.org/presentationml/2006/main">
   <p:cSld>
     <p:spTree>
@@ -13185,7 +13911,7 @@
 </p:sld>
 </file>
 
-<file path=ppt/slides/slide8.xml><?xml version="1.0" encoding="utf-8"?>
+<file path=ppt/slides/slide9.xml><?xml version="1.0" encoding="utf-8"?>
 <p:sld xmlns:a="http://schemas.openxmlformats.org/drawingml/2006/main" xmlns:r="http://schemas.openxmlformats.org/officeDocument/2006/relationships" xmlns:p="http://schemas.openxmlformats.org/presentationml/2006/main">
   <p:cSld>
     <p:spTree>
@@ -14074,522 +14800,10 @@
 </p:sld>
 </file>
 
-<file path=ppt/slides/slide9.xml><?xml version="1.0" encoding="utf-8"?>
-<p:sld xmlns:a="http://schemas.openxmlformats.org/drawingml/2006/main" xmlns:r="http://schemas.openxmlformats.org/officeDocument/2006/relationships" xmlns:p="http://schemas.openxmlformats.org/presentationml/2006/main">
-  <p:cSld>
-    <p:spTree>
-      <p:nvGrpSpPr>
-        <p:cNvPr id="1" name=""/>
-        <p:cNvGrpSpPr/>
-        <p:nvPr/>
-      </p:nvGrpSpPr>
-      <p:grpSpPr>
-        <a:xfrm>
-          <a:off x="0" y="0"/>
-          <a:ext cx="0" cy="0"/>
-          <a:chOff x="0" y="0"/>
-          <a:chExt cx="0" cy="0"/>
-        </a:xfrm>
-      </p:grpSpPr>
-      <p:sp>
-        <p:nvSpPr>
-          <p:cNvPr id="2" name="Title 1">
-            <a:extLst>
-              <a:ext uri="{FF2B5EF4-FFF2-40B4-BE49-F238E27FC236}">
-                <a16:creationId xmlns:a16="http://schemas.microsoft.com/office/drawing/2014/main" id="{EE64177A-F9CF-424F-84AA-D8C843F1B4C4}"/>
-              </a:ext>
-            </a:extLst>
-          </p:cNvPr>
-          <p:cNvSpPr>
-            <a:spLocks noGrp="1"/>
-          </p:cNvSpPr>
-          <p:nvPr>
-            <p:ph type="title"/>
-          </p:nvPr>
-        </p:nvSpPr>
-        <p:spPr/>
-        <p:txBody>
-          <a:bodyPr/>
-          <a:lstStyle/>
-          <a:p>
-            <a:pPr algn="r"/>
-            <a:r>
-              <a:rPr lang="fa-IR" b="1" i="0" dirty="0">
-                <a:solidFill>
-                  <a:schemeClr val="accent1"/>
-                </a:solidFill>
-                <a:effectLst/>
-                <a:latin typeface="-apple-system"/>
-                <a:cs typeface="B Nazanin" panose="00000400000000000000" pitchFamily="2" charset="-78"/>
-              </a:rPr>
-              <a:t>اشکالات فعلی</a:t>
-            </a:r>
-          </a:p>
-        </p:txBody>
-      </p:sp>
-      <p:sp>
-        <p:nvSpPr>
-          <p:cNvPr id="3" name="Content Placeholder 2">
-            <a:extLst>
-              <a:ext uri="{FF2B5EF4-FFF2-40B4-BE49-F238E27FC236}">
-                <a16:creationId xmlns:a16="http://schemas.microsoft.com/office/drawing/2014/main" id="{0619F152-B119-4B23-9A5D-EB233158E6F0}"/>
-              </a:ext>
-            </a:extLst>
-          </p:cNvPr>
-          <p:cNvSpPr>
-            <a:spLocks noGrp="1"/>
-          </p:cNvSpPr>
-          <p:nvPr>
-            <p:ph idx="1"/>
-          </p:nvPr>
-        </p:nvSpPr>
-        <p:spPr>
-          <a:xfrm>
-            <a:off x="2339788" y="2133600"/>
-            <a:ext cx="9164824" cy="3777622"/>
-          </a:xfrm>
-        </p:spPr>
-        <p:txBody>
-          <a:bodyPr>
-            <a:normAutofit/>
-          </a:bodyPr>
-          <a:lstStyle/>
-          <a:p>
-            <a:pPr algn="just" rtl="1"/>
-            <a:r>
-              <a:rPr lang="fa-IR" sz="2000" b="0" i="0" dirty="0">
-                <a:solidFill>
-                  <a:schemeClr val="tx1"/>
-                </a:solidFill>
-                <a:effectLst/>
-                <a:latin typeface="-apple-system"/>
-                <a:cs typeface="B Nazanin" panose="00000400000000000000" pitchFamily="2" charset="-78"/>
-              </a:rPr>
-              <a:t>دیتابیس وجود ندارد؛ بنابراین تاریخچه مقاله‌ها، جلوگیری از تکرار، </a:t>
-            </a:r>
-            <a:r>
-              <a:rPr lang="en-US" sz="2000" b="0" i="0" dirty="0">
-                <a:solidFill>
-                  <a:schemeClr val="tx1"/>
-                </a:solidFill>
-                <a:effectLst/>
-                <a:latin typeface="-apple-system"/>
-                <a:cs typeface="B Nazanin" panose="00000400000000000000" pitchFamily="2" charset="-78"/>
-              </a:rPr>
-              <a:t>audit </a:t>
-            </a:r>
-            <a:r>
-              <a:rPr lang="fa-IR" sz="2000" b="0" i="0" dirty="0">
-                <a:solidFill>
-                  <a:schemeClr val="tx1"/>
-                </a:solidFill>
-                <a:effectLst/>
-                <a:latin typeface="-apple-system"/>
-                <a:cs typeface="B Nazanin" panose="00000400000000000000" pitchFamily="2" charset="-78"/>
-              </a:rPr>
-              <a:t>و </a:t>
-            </a:r>
-            <a:r>
-              <a:rPr lang="en-US" sz="2000" b="0" i="0" dirty="0">
-                <a:solidFill>
-                  <a:schemeClr val="tx1"/>
-                </a:solidFill>
-                <a:effectLst/>
-                <a:latin typeface="-apple-system"/>
-                <a:cs typeface="B Nazanin" panose="00000400000000000000" pitchFamily="2" charset="-78"/>
-              </a:rPr>
-              <a:t>retry </a:t>
-            </a:r>
-            <a:r>
-              <a:rPr lang="fa-IR" sz="2000" b="0" i="0" dirty="0">
-                <a:solidFill>
-                  <a:schemeClr val="tx1"/>
-                </a:solidFill>
-                <a:effectLst/>
-                <a:latin typeface="-apple-system"/>
-                <a:cs typeface="B Nazanin" panose="00000400000000000000" pitchFamily="2" charset="-78"/>
-              </a:rPr>
-              <a:t>پایدار نداریم.</a:t>
-            </a:r>
-          </a:p>
-          <a:p>
-            <a:pPr algn="just" rtl="1"/>
-            <a:r>
-              <a:rPr lang="fa-IR" sz="2000" b="0" i="0" strike="sngStrike" dirty="0">
-                <a:solidFill>
-                  <a:schemeClr val="tx1"/>
-                </a:solidFill>
-                <a:effectLst/>
-                <a:latin typeface="-apple-system"/>
-                <a:cs typeface="B Nazanin" panose="00000400000000000000" pitchFamily="2" charset="-78"/>
-              </a:rPr>
-              <a:t>تأیید انسانی قبل از انتشار وجود ندارد.</a:t>
-            </a:r>
-          </a:p>
-          <a:p>
-            <a:pPr algn="just" rtl="1"/>
-            <a:r>
-              <a:rPr lang="en-US" sz="2000" b="0" i="0" dirty="0">
-                <a:solidFill>
-                  <a:schemeClr val="tx1"/>
-                </a:solidFill>
-                <a:effectLst/>
-                <a:latin typeface="-apple-system"/>
-                <a:cs typeface="B Nazanin" panose="00000400000000000000" pitchFamily="2" charset="-78"/>
-              </a:rPr>
-              <a:t>queue </a:t>
-            </a:r>
-            <a:r>
-              <a:rPr lang="fa-IR" sz="2000" b="0" i="0" dirty="0">
-                <a:solidFill>
-                  <a:schemeClr val="tx1"/>
-                </a:solidFill>
-                <a:effectLst/>
-                <a:latin typeface="-apple-system"/>
-                <a:cs typeface="B Nazanin" panose="00000400000000000000" pitchFamily="2" charset="-78"/>
-              </a:rPr>
-              <a:t>یا </a:t>
-            </a:r>
-            <a:r>
-              <a:rPr lang="en-US" sz="2000" b="0" i="0" dirty="0">
-                <a:solidFill>
-                  <a:schemeClr val="tx1"/>
-                </a:solidFill>
-                <a:effectLst/>
-                <a:latin typeface="-apple-system"/>
-                <a:cs typeface="B Nazanin" panose="00000400000000000000" pitchFamily="2" charset="-78"/>
-              </a:rPr>
-              <a:t>job history </a:t>
-            </a:r>
-            <a:r>
-              <a:rPr lang="fa-IR" sz="2000" b="0" i="0" dirty="0">
-                <a:solidFill>
-                  <a:schemeClr val="tx1"/>
-                </a:solidFill>
-                <a:effectLst/>
-                <a:latin typeface="-apple-system"/>
-                <a:cs typeface="B Nazanin" panose="00000400000000000000" pitchFamily="2" charset="-78"/>
-              </a:rPr>
-              <a:t>وجود ندارد.</a:t>
-            </a:r>
-          </a:p>
-          <a:p>
-            <a:pPr algn="just" rtl="1"/>
-            <a:r>
-              <a:rPr lang="fa-IR" sz="2000" b="0" i="0" dirty="0">
-                <a:solidFill>
-                  <a:schemeClr val="tx1"/>
-                </a:solidFill>
-                <a:effectLst/>
-                <a:latin typeface="-apple-system"/>
-                <a:cs typeface="B Nazanin" panose="00000400000000000000" pitchFamily="2" charset="-78"/>
-              </a:rPr>
-              <a:t>مانیتورینگ </a:t>
-            </a:r>
-            <a:r>
-              <a:rPr lang="en-US" sz="2000" b="0" i="0" dirty="0">
-                <a:solidFill>
-                  <a:schemeClr val="tx1"/>
-                </a:solidFill>
-                <a:effectLst/>
-                <a:latin typeface="-apple-system"/>
-                <a:cs typeface="B Nazanin" panose="00000400000000000000" pitchFamily="2" charset="-78"/>
-              </a:rPr>
-              <a:t>production </a:t>
-            </a:r>
-            <a:r>
-              <a:rPr lang="fa-IR" sz="2000" b="0" i="0" dirty="0">
-                <a:solidFill>
-                  <a:schemeClr val="tx1"/>
-                </a:solidFill>
-                <a:effectLst/>
-                <a:latin typeface="-apple-system"/>
-                <a:cs typeface="B Nazanin" panose="00000400000000000000" pitchFamily="2" charset="-78"/>
-              </a:rPr>
-              <a:t>هنوز پایه‌ای است و به </a:t>
-            </a:r>
-            <a:r>
-              <a:rPr lang="en-US" sz="2000" b="0" i="0" dirty="0">
-                <a:solidFill>
-                  <a:schemeClr val="tx1"/>
-                </a:solidFill>
-                <a:effectLst/>
-                <a:latin typeface="-apple-system"/>
-                <a:cs typeface="B Nazanin" panose="00000400000000000000" pitchFamily="2" charset="-78"/>
-              </a:rPr>
-              <a:t>log </a:t>
-            </a:r>
-            <a:r>
-              <a:rPr lang="fa-IR" sz="2000" b="0" i="0" dirty="0">
-                <a:solidFill>
-                  <a:schemeClr val="tx1"/>
-                </a:solidFill>
-                <a:effectLst/>
-                <a:latin typeface="-apple-system"/>
-                <a:cs typeface="B Nazanin" panose="00000400000000000000" pitchFamily="2" charset="-78"/>
-              </a:rPr>
-              <a:t>محدود است.</a:t>
-            </a:r>
-          </a:p>
-          <a:p>
-            <a:pPr algn="just" rtl="1"/>
-            <a:r>
-              <a:rPr lang="en-US" sz="2000" b="0" i="0" dirty="0">
-                <a:solidFill>
-                  <a:schemeClr val="tx1"/>
-                </a:solidFill>
-                <a:effectLst/>
-                <a:latin typeface="-apple-system"/>
-                <a:cs typeface="B Nazanin" panose="00000400000000000000" pitchFamily="2" charset="-78"/>
-              </a:rPr>
-              <a:t>prompt</a:t>
-            </a:r>
-            <a:r>
-              <a:rPr lang="fa-IR" sz="2000" b="0" i="0" dirty="0">
-                <a:solidFill>
-                  <a:schemeClr val="tx1"/>
-                </a:solidFill>
-                <a:effectLst/>
-                <a:latin typeface="-apple-system"/>
-                <a:cs typeface="B Nazanin" panose="00000400000000000000" pitchFamily="2" charset="-78"/>
-              </a:rPr>
-              <a:t>ها هنوز نقش زیادی در کیفیت دارند و باید با داده واقعی بهینه شوند.</a:t>
-            </a:r>
-          </a:p>
-          <a:p>
-            <a:pPr algn="just" rtl="1"/>
-            <a:r>
-              <a:rPr lang="en-US" sz="2000" b="0" i="0" dirty="0">
-                <a:solidFill>
-                  <a:schemeClr val="tx1"/>
-                </a:solidFill>
-                <a:effectLst/>
-                <a:latin typeface="-apple-system"/>
-                <a:cs typeface="B Nazanin" panose="00000400000000000000" pitchFamily="2" charset="-78"/>
-              </a:rPr>
-              <a:t>Instagram </a:t>
-            </a:r>
-            <a:r>
-              <a:rPr lang="fa-IR" sz="2000" b="0" i="0" dirty="0">
-                <a:solidFill>
-                  <a:schemeClr val="tx1"/>
-                </a:solidFill>
-                <a:effectLst/>
-                <a:latin typeface="-apple-system"/>
-                <a:cs typeface="B Nazanin" panose="00000400000000000000" pitchFamily="2" charset="-78"/>
-              </a:rPr>
-              <a:t>هنوز کامل‌ترین مسیر </a:t>
-            </a:r>
-            <a:r>
-              <a:rPr lang="en-US" sz="2000" b="0" i="0" dirty="0">
-                <a:solidFill>
-                  <a:schemeClr val="tx1"/>
-                </a:solidFill>
-                <a:effectLst/>
-                <a:latin typeface="-apple-system"/>
-                <a:cs typeface="B Nazanin" panose="00000400000000000000" pitchFamily="2" charset="-78"/>
-              </a:rPr>
-              <a:t>production </a:t>
-            </a:r>
-            <a:r>
-              <a:rPr lang="fa-IR" sz="2000" b="0" i="0" dirty="0">
-                <a:solidFill>
-                  <a:schemeClr val="tx1"/>
-                </a:solidFill>
-                <a:effectLst/>
-                <a:latin typeface="-apple-system"/>
-                <a:cs typeface="B Nazanin" panose="00000400000000000000" pitchFamily="2" charset="-78"/>
-              </a:rPr>
-              <a:t>نیست، چون به تصویر و تنظیمات </a:t>
-            </a:r>
-            <a:r>
-              <a:rPr lang="en-US" sz="2000" b="0" i="0" dirty="0">
-                <a:solidFill>
-                  <a:schemeClr val="tx1"/>
-                </a:solidFill>
-                <a:effectLst/>
-                <a:latin typeface="-apple-system"/>
-                <a:cs typeface="B Nazanin" panose="00000400000000000000" pitchFamily="2" charset="-78"/>
-              </a:rPr>
-              <a:t>Meta </a:t>
-            </a:r>
-            <a:r>
-              <a:rPr lang="fa-IR" sz="2000" b="0" i="0" dirty="0">
-                <a:solidFill>
-                  <a:schemeClr val="tx1"/>
-                </a:solidFill>
-                <a:effectLst/>
-                <a:latin typeface="-apple-system"/>
-                <a:cs typeface="B Nazanin" panose="00000400000000000000" pitchFamily="2" charset="-78"/>
-              </a:rPr>
-              <a:t>وابسته است.</a:t>
-            </a:r>
-          </a:p>
-          <a:p>
-            <a:pPr algn="just" rtl="1"/>
-            <a:r>
-              <a:rPr lang="en-US" sz="2000" b="0" i="0" dirty="0">
-                <a:solidFill>
-                  <a:schemeClr val="tx1"/>
-                </a:solidFill>
-                <a:effectLst/>
-                <a:latin typeface="-apple-system"/>
-                <a:cs typeface="B Nazanin" panose="00000400000000000000" pitchFamily="2" charset="-78"/>
-              </a:rPr>
-              <a:t>SEO </a:t>
-            </a:r>
-            <a:r>
-              <a:rPr lang="fa-IR" sz="2000" b="0" i="0" dirty="0">
-                <a:solidFill>
-                  <a:schemeClr val="tx1"/>
-                </a:solidFill>
-                <a:effectLst/>
-                <a:latin typeface="-apple-system"/>
-                <a:cs typeface="B Nazanin" panose="00000400000000000000" pitchFamily="2" charset="-78"/>
-              </a:rPr>
-              <a:t>متادیتا برای بعضی </a:t>
-            </a:r>
-            <a:r>
-              <a:rPr lang="en-US" sz="2000" b="0" i="0" dirty="0">
-                <a:solidFill>
-                  <a:schemeClr val="tx1"/>
-                </a:solidFill>
-                <a:effectLst/>
-                <a:latin typeface="-apple-system"/>
-                <a:cs typeface="B Nazanin" panose="00000400000000000000" pitchFamily="2" charset="-78"/>
-              </a:rPr>
-              <a:t>plugin</a:t>
-            </a:r>
-            <a:r>
-              <a:rPr lang="fa-IR" sz="2000" b="0" i="0" dirty="0">
-                <a:solidFill>
-                  <a:schemeClr val="tx1"/>
-                </a:solidFill>
-                <a:effectLst/>
-                <a:latin typeface="-apple-system"/>
-                <a:cs typeface="B Nazanin" panose="00000400000000000000" pitchFamily="2" charset="-78"/>
-              </a:rPr>
-              <a:t>ها ممکن است به </a:t>
-            </a:r>
-            <a:r>
-              <a:rPr lang="en-US" sz="2000" b="0" i="0" dirty="0">
-                <a:solidFill>
-                  <a:schemeClr val="tx1"/>
-                </a:solidFill>
-                <a:effectLst/>
-                <a:latin typeface="-apple-system"/>
-                <a:cs typeface="B Nazanin" panose="00000400000000000000" pitchFamily="2" charset="-78"/>
-              </a:rPr>
-              <a:t>register </a:t>
-            </a:r>
-            <a:r>
-              <a:rPr lang="fa-IR" sz="2000" b="0" i="0" dirty="0">
-                <a:solidFill>
-                  <a:schemeClr val="tx1"/>
-                </a:solidFill>
-                <a:effectLst/>
-                <a:latin typeface="-apple-system"/>
-                <a:cs typeface="B Nazanin" panose="00000400000000000000" pitchFamily="2" charset="-78"/>
-              </a:rPr>
-              <a:t>کردن </a:t>
-            </a:r>
-            <a:r>
-              <a:rPr lang="en-US" sz="2000" b="0" i="0" dirty="0">
-                <a:solidFill>
-                  <a:schemeClr val="tx1"/>
-                </a:solidFill>
-                <a:effectLst/>
-                <a:latin typeface="-apple-system"/>
-                <a:cs typeface="B Nazanin" panose="00000400000000000000" pitchFamily="2" charset="-78"/>
-              </a:rPr>
-              <a:t>meta </a:t>
-            </a:r>
-            <a:r>
-              <a:rPr lang="fa-IR" sz="2000" b="0" i="0" dirty="0">
-                <a:solidFill>
-                  <a:schemeClr val="tx1"/>
-                </a:solidFill>
-                <a:effectLst/>
-                <a:latin typeface="-apple-system"/>
-                <a:cs typeface="B Nazanin" panose="00000400000000000000" pitchFamily="2" charset="-78"/>
-              </a:rPr>
-              <a:t>در وردپرس نیاز داشته باشد.</a:t>
-            </a:r>
-          </a:p>
-          <a:p>
-            <a:pPr algn="just" rtl="1"/>
-            <a:r>
-              <a:rPr lang="fa-IR" sz="2000" b="0" i="0" dirty="0">
-                <a:solidFill>
-                  <a:schemeClr val="tx1"/>
-                </a:solidFill>
-                <a:effectLst/>
-                <a:latin typeface="-apple-system"/>
-                <a:cs typeface="B Nazanin" panose="00000400000000000000" pitchFamily="2" charset="-78"/>
-              </a:rPr>
-              <a:t>تصویرهای پیدا‌شده از صفحات منبع از نظر کیفیت، تناسب و مجوز استفاده باید قبل از انتشار عمومی بازبینی شوند.</a:t>
-            </a:r>
-          </a:p>
-        </p:txBody>
-      </p:sp>
-      <p:sp>
-        <p:nvSpPr>
-          <p:cNvPr id="5" name="TextBox 4">
-            <a:extLst>
-              <a:ext uri="{FF2B5EF4-FFF2-40B4-BE49-F238E27FC236}">
-                <a16:creationId xmlns:a16="http://schemas.microsoft.com/office/drawing/2014/main" id="{A050C4D1-4D91-47F4-BA7B-D91E90F84C07}"/>
-              </a:ext>
-            </a:extLst>
-          </p:cNvPr>
-          <p:cNvSpPr txBox="1"/>
-          <p:nvPr/>
-        </p:nvSpPr>
-        <p:spPr>
-          <a:xfrm>
-            <a:off x="243840" y="751840"/>
-            <a:ext cx="528320" cy="369332"/>
-          </a:xfrm>
-          <a:prstGeom prst="rect">
-            <a:avLst/>
-          </a:prstGeom>
-          <a:noFill/>
-        </p:spPr>
-        <p:txBody>
-          <a:bodyPr wrap="square" rtlCol="0">
-            <a:spAutoFit/>
-          </a:bodyPr>
-          <a:lstStyle/>
-          <a:p>
-            <a:pPr algn="r" rtl="1"/>
-            <a:r>
-              <a:rPr lang="en-US" dirty="0">
-                <a:solidFill>
-                  <a:schemeClr val="bg1"/>
-                </a:solidFill>
-                <a:cs typeface="B Nazanin" panose="00000400000000000000" pitchFamily="2" charset="-78"/>
-              </a:rPr>
-              <a:t>9</a:t>
-            </a:r>
-          </a:p>
-        </p:txBody>
-      </p:sp>
-    </p:spTree>
-    <p:extLst>
-      <p:ext uri="{BB962C8B-B14F-4D97-AF65-F5344CB8AC3E}">
-        <p14:creationId xmlns:p14="http://schemas.microsoft.com/office/powerpoint/2010/main" val="3472642709"/>
-      </p:ext>
-    </p:extLst>
-  </p:cSld>
-  <p:clrMapOvr>
-    <a:masterClrMapping/>
-  </p:clrMapOvr>
-</p:sld>
-</file>
-
 <file path=ppt/theme/theme1.xml><?xml version="1.0" encoding="utf-8"?>
 <a:theme xmlns:a="http://schemas.openxmlformats.org/drawingml/2006/main" name="Wisp">
   <a:themeElements>
-    <a:clrScheme name="Wisp">
+    <a:clrScheme name="Blue Warm">
       <a:dk1>
         <a:sysClr val="windowText" lastClr="000000"/>
       </a:dk1>
@@ -14597,34 +14811,34 @@
         <a:sysClr val="window" lastClr="FFFFFF"/>
       </a:lt1>
       <a:dk2>
-        <a:srgbClr val="766F54"/>
+        <a:srgbClr val="242852"/>
       </a:dk2>
       <a:lt2>
-        <a:srgbClr val="E3EACF"/>
+        <a:srgbClr val="ACCBF9"/>
       </a:lt2>
       <a:accent1>
-        <a:srgbClr val="A53010"/>
+        <a:srgbClr val="4A66AC"/>
       </a:accent1>
       <a:accent2>
-        <a:srgbClr val="DE7E18"/>
+        <a:srgbClr val="629DD1"/>
       </a:accent2>
       <a:accent3>
-        <a:srgbClr val="9F8351"/>
+        <a:srgbClr val="297FD5"/>
       </a:accent3>
       <a:accent4>
-        <a:srgbClr val="728653"/>
+        <a:srgbClr val="7F8FA9"/>
       </a:accent4>
       <a:accent5>
-        <a:srgbClr val="92AA4C"/>
+        <a:srgbClr val="5AA2AE"/>
       </a:accent5>
       <a:accent6>
-        <a:srgbClr val="6AAC91"/>
+        <a:srgbClr val="9D90A0"/>
       </a:accent6>
       <a:hlink>
-        <a:srgbClr val="FB4A18"/>
+        <a:srgbClr val="9454C3"/>
       </a:hlink>
       <a:folHlink>
-        <a:srgbClr val="FB9318"/>
+        <a:srgbClr val="3EBBF0"/>
       </a:folHlink>
     </a:clrScheme>
     <a:fontScheme name="Wisp">
